--- a/slides/CSS Flex box & Flex gird.pptx
+++ b/slides/CSS Flex box & Flex gird.pptx
@@ -5,19 +5,21 @@
     <p:sldMasterId id="2147483650" r:id="rId1"/>
   </p:sldMasterIdLst>
   <p:notesMasterIdLst>
-    <p:notesMasterId r:id="rId12"/>
+    <p:notesMasterId r:id="rId14"/>
   </p:notesMasterIdLst>
   <p:sldIdLst>
     <p:sldId id="256" r:id="rId2"/>
     <p:sldId id="257" r:id="rId3"/>
-    <p:sldId id="258" r:id="rId4"/>
-    <p:sldId id="259" r:id="rId5"/>
-    <p:sldId id="260" r:id="rId6"/>
-    <p:sldId id="261" r:id="rId7"/>
-    <p:sldId id="262" r:id="rId8"/>
-    <p:sldId id="263" r:id="rId9"/>
-    <p:sldId id="264" r:id="rId10"/>
-    <p:sldId id="265" r:id="rId11"/>
+    <p:sldId id="266" r:id="rId4"/>
+    <p:sldId id="258" r:id="rId5"/>
+    <p:sldId id="259" r:id="rId6"/>
+    <p:sldId id="260" r:id="rId7"/>
+    <p:sldId id="261" r:id="rId8"/>
+    <p:sldId id="262" r:id="rId9"/>
+    <p:sldId id="263" r:id="rId10"/>
+    <p:sldId id="264" r:id="rId11"/>
+    <p:sldId id="265" r:id="rId12"/>
+    <p:sldId id="267" r:id="rId13"/>
   </p:sldIdLst>
   <p:sldSz cx="12192000" cy="6858000"/>
   <p:notesSz cx="6858000" cy="9144000"/>
@@ -127,7 +129,7 @@
 <file path=ppt/revisionInfo.xml><?xml version="1.0" encoding="utf-8"?>
 <p1510:revInfo xmlns:a="http://schemas.openxmlformats.org/drawingml/2006/main" xmlns:r="http://schemas.openxmlformats.org/officeDocument/2006/relationships" xmlns:p1510="http://schemas.microsoft.com/office/powerpoint/2015/10/main">
   <p1510:revLst>
-    <p1510:client id="{A741E21D-9E40-4486-BCAB-1B1D063C8F28}" v="732" dt="2026-02-28T07:53:05.407"/>
+    <p1510:client id="{A741E21D-9E40-4486-BCAB-1B1D063C8F28}" v="738" dt="2026-02-28T16:11:33.987"/>
   </p1510:revLst>
 </p1510:revInfo>
 </file>
@@ -136,8 +138,8 @@
 <pc:chgInfo xmlns:a="http://schemas.openxmlformats.org/drawingml/2006/main" xmlns:r="http://schemas.openxmlformats.org/officeDocument/2006/relationships" xmlns:ac="http://schemas.microsoft.com/office/drawing/2013/main/command" xmlns:pc="http://schemas.microsoft.com/office/powerpoint/2013/main/command">
   <pc:docChgLst>
     <pc:chgData name="justin fread" userId="35565ca3bf38d4f7" providerId="LiveId" clId="{55029DE6-1563-4F07-9D39-FEE90A641FD3}"/>
-    <pc:docChg chg="undo custSel addSld modSld modMainMaster">
-      <pc:chgData name="justin fread" userId="35565ca3bf38d4f7" providerId="LiveId" clId="{55029DE6-1563-4F07-9D39-FEE90A641FD3}" dt="2026-02-28T07:53:06.273" v="6077"/>
+    <pc:docChg chg="undo custSel addSld modSld sldOrd modMainMaster">
+      <pc:chgData name="justin fread" userId="35565ca3bf38d4f7" providerId="LiveId" clId="{55029DE6-1563-4F07-9D39-FEE90A641FD3}" dt="2026-02-28T16:37:18.740" v="8077" actId="20577"/>
       <pc:docMkLst>
         <pc:docMk/>
       </pc:docMkLst>
@@ -520,6 +522,68 @@
             <pc:docMk/>
             <pc:sldMk cId="179229106" sldId="265"/>
             <ac:spMk id="4" creationId="{6C7E2C18-6E17-1DAB-CF77-DE61D5F37A5F}"/>
+          </ac:spMkLst>
+        </pc:spChg>
+      </pc:sldChg>
+      <pc:sldChg chg="modSp new mod ord">
+        <pc:chgData name="justin fread" userId="35565ca3bf38d4f7" providerId="LiveId" clId="{55029DE6-1563-4F07-9D39-FEE90A641FD3}" dt="2026-02-28T16:02:15.183" v="7312" actId="20577"/>
+        <pc:sldMkLst>
+          <pc:docMk/>
+          <pc:sldMk cId="2301656891" sldId="266"/>
+        </pc:sldMkLst>
+        <pc:spChg chg="mod">
+          <ac:chgData name="justin fread" userId="35565ca3bf38d4f7" providerId="LiveId" clId="{55029DE6-1563-4F07-9D39-FEE90A641FD3}" dt="2026-02-28T15:53:46.847" v="7249" actId="20577"/>
+          <ac:spMkLst>
+            <pc:docMk/>
+            <pc:sldMk cId="2301656891" sldId="266"/>
+            <ac:spMk id="2" creationId="{07FF0E22-7853-E22A-38FE-C0F8754E1955}"/>
+          </ac:spMkLst>
+        </pc:spChg>
+        <pc:spChg chg="mod">
+          <ac:chgData name="justin fread" userId="35565ca3bf38d4f7" providerId="LiveId" clId="{55029DE6-1563-4F07-9D39-FEE90A641FD3}" dt="2026-02-28T16:02:15.183" v="7312" actId="20577"/>
+          <ac:spMkLst>
+            <pc:docMk/>
+            <pc:sldMk cId="2301656891" sldId="266"/>
+            <ac:spMk id="3" creationId="{95F3D142-3D3E-D7CA-63D7-BC2A466E6D1F}"/>
+          </ac:spMkLst>
+        </pc:spChg>
+      </pc:sldChg>
+      <pc:sldChg chg="addSp delSp modSp new mod">
+        <pc:chgData name="justin fread" userId="35565ca3bf38d4f7" providerId="LiveId" clId="{55029DE6-1563-4F07-9D39-FEE90A641FD3}" dt="2026-02-28T16:37:18.740" v="8077" actId="20577"/>
+        <pc:sldMkLst>
+          <pc:docMk/>
+          <pc:sldMk cId="769394946" sldId="267"/>
+        </pc:sldMkLst>
+        <pc:spChg chg="del mod">
+          <ac:chgData name="justin fread" userId="35565ca3bf38d4f7" providerId="LiveId" clId="{55029DE6-1563-4F07-9D39-FEE90A641FD3}" dt="2026-02-28T16:07:32.276" v="7313" actId="21"/>
+          <ac:spMkLst>
+            <pc:docMk/>
+            <pc:sldMk cId="769394946" sldId="267"/>
+            <ac:spMk id="2" creationId="{ABC0AB1D-EF7E-B507-A381-032E7DA1B4DD}"/>
+          </ac:spMkLst>
+        </pc:spChg>
+        <pc:spChg chg="mod">
+          <ac:chgData name="justin fread" userId="35565ca3bf38d4f7" providerId="LiveId" clId="{55029DE6-1563-4F07-9D39-FEE90A641FD3}" dt="2026-02-28T16:37:18.740" v="8077" actId="20577"/>
+          <ac:spMkLst>
+            <pc:docMk/>
+            <pc:sldMk cId="769394946" sldId="267"/>
+            <ac:spMk id="3" creationId="{C7EA3E3E-72A9-70B6-66BD-6A5925EAFB73}"/>
+          </ac:spMkLst>
+        </pc:spChg>
+        <pc:spChg chg="add mod">
+          <ac:chgData name="justin fread" userId="35565ca3bf38d4f7" providerId="LiveId" clId="{55029DE6-1563-4F07-9D39-FEE90A641FD3}" dt="2026-02-28T16:08:53.300" v="7343"/>
+          <ac:spMkLst>
+            <pc:docMk/>
+            <pc:sldMk cId="769394946" sldId="267"/>
+            <ac:spMk id="4" creationId="{ABC0AB1D-EF7E-B507-A381-032E7DA1B4DD}"/>
+          </ac:spMkLst>
+        </pc:spChg>
+        <pc:spChg chg="add del mod">
+          <ac:chgData name="justin fread" userId="35565ca3bf38d4f7" providerId="LiveId" clId="{55029DE6-1563-4F07-9D39-FEE90A641FD3}" dt="2026-02-28T16:12:15.200" v="7388" actId="21"/>
+          <ac:spMkLst>
+            <pc:docMk/>
+            <pc:sldMk cId="769394946" sldId="267"/>
+            <ac:spMk id="5" creationId="{7EA95D47-AED3-308B-9609-216593DE3048}"/>
           </ac:spMkLst>
         </pc:spChg>
       </pc:sldChg>
@@ -17323,6 +17387,208 @@
       </p:grpSpPr>
       <p:sp>
         <p:nvSpPr>
+          <p:cNvPr id="2" name="Title 1">
+            <a:extLst>
+              <a:ext uri="{FF2B5EF4-FFF2-40B4-BE49-F238E27FC236}">
+                <a16:creationId xmlns:a16="http://schemas.microsoft.com/office/drawing/2014/main" id="{E677A1B9-33DB-262A-C54D-31C6B511B49E}"/>
+              </a:ext>
+            </a:extLst>
+          </p:cNvPr>
+          <p:cNvSpPr>
+            <a:spLocks noGrp="1"/>
+          </p:cNvSpPr>
+          <p:nvPr>
+            <p:ph type="title"/>
+          </p:nvPr>
+        </p:nvSpPr>
+        <p:spPr/>
+        <p:txBody>
+          <a:bodyPr/>
+          <a:lstStyle/>
+          <a:p>
+            <a:r>
+              <a:rPr lang="en-US" dirty="0"/>
+              <a:t>JSX file</a:t>
+            </a:r>
+          </a:p>
+        </p:txBody>
+      </p:sp>
+      <p:sp>
+        <p:nvSpPr>
+          <p:cNvPr id="3" name="Content Placeholder 2">
+            <a:extLst>
+              <a:ext uri="{FF2B5EF4-FFF2-40B4-BE49-F238E27FC236}">
+                <a16:creationId xmlns:a16="http://schemas.microsoft.com/office/drawing/2014/main" id="{508A66E4-2AF9-9E84-1D11-1BD1EA68A798}"/>
+              </a:ext>
+            </a:extLst>
+          </p:cNvPr>
+          <p:cNvSpPr>
+            <a:spLocks noGrp="1"/>
+          </p:cNvSpPr>
+          <p:nvPr>
+            <p:ph idx="1"/>
+          </p:nvPr>
+        </p:nvSpPr>
+        <p:spPr/>
+        <p:txBody>
+          <a:bodyPr/>
+          <a:lstStyle/>
+          <a:p>
+            <a:pPr marL="0" indent="0">
+              <a:buNone/>
+            </a:pPr>
+            <a:r>
+              <a:rPr lang="en-US" dirty="0"/>
+              <a:t>import styles from "./Boxes.module.css";</a:t>
+            </a:r>
+          </a:p>
+          <a:p>
+            <a:pPr marL="0" indent="0">
+              <a:buNone/>
+            </a:pPr>
+            <a:r>
+              <a:rPr lang="en-US" dirty="0"/>
+              <a:t>export default function Boxes() {</a:t>
+            </a:r>
+          </a:p>
+          <a:p>
+            <a:pPr marL="0" indent="0">
+              <a:spcBef>
+                <a:spcPts val="0"/>
+              </a:spcBef>
+              <a:buNone/>
+            </a:pPr>
+            <a:r>
+              <a:rPr lang="en-US" dirty="0"/>
+              <a:t>  return (</a:t>
+            </a:r>
+          </a:p>
+          <a:p>
+            <a:pPr marL="0" indent="0">
+              <a:spcBef>
+                <a:spcPts val="0"/>
+              </a:spcBef>
+              <a:buNone/>
+            </a:pPr>
+            <a:r>
+              <a:rPr lang="en-US" dirty="0"/>
+              <a:t>    &lt;div </a:t>
+            </a:r>
+            <a:r>
+              <a:rPr lang="en-US" dirty="0" err="1"/>
+              <a:t>className</a:t>
+            </a:r>
+            <a:r>
+              <a:rPr lang="en-US" dirty="0"/>
+              <a:t>={</a:t>
+            </a:r>
+            <a:r>
+              <a:rPr lang="en-US" dirty="0" err="1"/>
+              <a:t>styles.container</a:t>
+            </a:r>
+            <a:r>
+              <a:rPr lang="en-US" dirty="0"/>
+              <a:t>}&gt;</a:t>
+            </a:r>
+          </a:p>
+          <a:p>
+            <a:pPr marL="0" indent="0">
+              <a:spcBef>
+                <a:spcPts val="0"/>
+              </a:spcBef>
+              <a:buNone/>
+            </a:pPr>
+            <a:r>
+              <a:rPr lang="en-US" dirty="0"/>
+              <a:t>       &lt;div </a:t>
+            </a:r>
+            <a:r>
+              <a:rPr lang="en-US" dirty="0" err="1"/>
+              <a:t>className</a:t>
+            </a:r>
+            <a:r>
+              <a:rPr lang="en-US" dirty="0"/>
+              <a:t>={</a:t>
+            </a:r>
+            <a:r>
+              <a:rPr lang="en-US" dirty="0" err="1"/>
+              <a:t>styles.item</a:t>
+            </a:r>
+            <a:r>
+              <a:rPr lang="en-US" dirty="0"/>
+              <a:t>}&gt; Little Box&lt;/div&gt;</a:t>
+            </a:r>
+          </a:p>
+          <a:p>
+            <a:pPr marL="0" indent="0">
+              <a:spcBef>
+                <a:spcPts val="0"/>
+              </a:spcBef>
+              <a:buNone/>
+            </a:pPr>
+            <a:r>
+              <a:rPr lang="en-US" dirty="0"/>
+              <a:t>    &lt;/div&gt;</a:t>
+            </a:r>
+          </a:p>
+          <a:p>
+            <a:pPr marL="0" indent="0">
+              <a:spcBef>
+                <a:spcPts val="0"/>
+              </a:spcBef>
+              <a:buNone/>
+            </a:pPr>
+            <a:r>
+              <a:rPr lang="en-US" dirty="0"/>
+              <a:t>  )</a:t>
+            </a:r>
+          </a:p>
+          <a:p>
+            <a:pPr marL="0" indent="0">
+              <a:spcBef>
+                <a:spcPts val="0"/>
+              </a:spcBef>
+              <a:buNone/>
+            </a:pPr>
+            <a:r>
+              <a:rPr lang="en-US" dirty="0"/>
+              <a:t>};</a:t>
+            </a:r>
+          </a:p>
+        </p:txBody>
+      </p:sp>
+    </p:spTree>
+    <p:extLst>
+      <p:ext uri="{BB962C8B-B14F-4D97-AF65-F5344CB8AC3E}">
+        <p14:creationId xmlns:p14="http://schemas.microsoft.com/office/powerpoint/2010/main" val="471398665"/>
+      </p:ext>
+    </p:extLst>
+  </p:cSld>
+  <p:clrMapOvr>
+    <a:masterClrMapping/>
+  </p:clrMapOvr>
+</p:sld>
+</file>
+
+<file path=ppt/slides/slide11.xml><?xml version="1.0" encoding="utf-8"?>
+<p:sld xmlns:a="http://schemas.openxmlformats.org/drawingml/2006/main" xmlns:r="http://schemas.openxmlformats.org/officeDocument/2006/relationships" xmlns:p="http://schemas.openxmlformats.org/presentationml/2006/main">
+  <p:cSld>
+    <p:spTree>
+      <p:nvGrpSpPr>
+        <p:cNvPr id="1" name=""/>
+        <p:cNvGrpSpPr/>
+        <p:nvPr/>
+      </p:nvGrpSpPr>
+      <p:grpSpPr>
+        <a:xfrm>
+          <a:off x="0" y="0"/>
+          <a:ext cx="0" cy="0"/>
+          <a:chOff x="0" y="0"/>
+          <a:chExt cx="0" cy="0"/>
+        </a:xfrm>
+      </p:grpSpPr>
+      <p:sp>
+        <p:nvSpPr>
           <p:cNvPr id="3" name="Content Placeholder 2">
             <a:extLst>
               <a:ext uri="{FF2B5EF4-FFF2-40B4-BE49-F238E27FC236}">
@@ -17537,6 +17803,211 @@
     <p:extLst>
       <p:ext uri="{BB962C8B-B14F-4D97-AF65-F5344CB8AC3E}">
         <p14:creationId xmlns:p14="http://schemas.microsoft.com/office/powerpoint/2010/main" val="179229106"/>
+      </p:ext>
+    </p:extLst>
+  </p:cSld>
+  <p:clrMapOvr>
+    <a:masterClrMapping/>
+  </p:clrMapOvr>
+</p:sld>
+</file>
+
+<file path=ppt/slides/slide12.xml><?xml version="1.0" encoding="utf-8"?>
+<p:sld xmlns:a="http://schemas.openxmlformats.org/drawingml/2006/main" xmlns:r="http://schemas.openxmlformats.org/officeDocument/2006/relationships" xmlns:p="http://schemas.openxmlformats.org/presentationml/2006/main">
+  <p:cSld>
+    <p:spTree>
+      <p:nvGrpSpPr>
+        <p:cNvPr id="1" name=""/>
+        <p:cNvGrpSpPr/>
+        <p:nvPr/>
+      </p:nvGrpSpPr>
+      <p:grpSpPr>
+        <a:xfrm>
+          <a:off x="0" y="0"/>
+          <a:ext cx="0" cy="0"/>
+          <a:chOff x="0" y="0"/>
+          <a:chExt cx="0" cy="0"/>
+        </a:xfrm>
+      </p:grpSpPr>
+      <p:sp>
+        <p:nvSpPr>
+          <p:cNvPr id="3" name="Content Placeholder 2">
+            <a:extLst>
+              <a:ext uri="{FF2B5EF4-FFF2-40B4-BE49-F238E27FC236}">
+                <a16:creationId xmlns:a16="http://schemas.microsoft.com/office/drawing/2014/main" id="{C7EA3E3E-72A9-70B6-66BD-6A5925EAFB73}"/>
+              </a:ext>
+            </a:extLst>
+          </p:cNvPr>
+          <p:cNvSpPr>
+            <a:spLocks noGrp="1"/>
+          </p:cNvSpPr>
+          <p:nvPr>
+            <p:ph idx="1"/>
+          </p:nvPr>
+        </p:nvSpPr>
+        <p:spPr>
+          <a:xfrm>
+            <a:off x="149291" y="391887"/>
+            <a:ext cx="11868538" cy="5890042"/>
+          </a:xfrm>
+        </p:spPr>
+        <p:txBody>
+          <a:bodyPr>
+            <a:normAutofit/>
+          </a:bodyPr>
+          <a:lstStyle/>
+          <a:p>
+            <a:pPr>
+              <a:spcBef>
+                <a:spcPts val="0"/>
+              </a:spcBef>
+              <a:buFont typeface="Wingdings" panose="05000000000000000000" pitchFamily="2" charset="2"/>
+              <a:buChar char="Ø"/>
+            </a:pPr>
+            <a:r>
+              <a:rPr lang="en-US" sz="2800" dirty="0">
+                <a:solidFill>
+                  <a:srgbClr val="0070C0"/>
+                </a:solidFill>
+              </a:rPr>
+              <a:t> .container {              /* class </a:t>
+            </a:r>
+            <a:r>
+              <a:rPr lang="en-US" sz="2800" dirty="0" err="1">
+                <a:solidFill>
+                  <a:srgbClr val="0070C0"/>
+                </a:solidFill>
+              </a:rPr>
+              <a:t>decloration</a:t>
+            </a:r>
+            <a:r>
+              <a:rPr lang="en-US" sz="2800" dirty="0">
+                <a:solidFill>
+                  <a:srgbClr val="0070C0"/>
+                </a:solidFill>
+              </a:rPr>
+              <a:t> */</a:t>
+            </a:r>
+          </a:p>
+          <a:p>
+            <a:pPr marL="457200" lvl="2" indent="0">
+              <a:spcBef>
+                <a:spcPts val="0"/>
+              </a:spcBef>
+              <a:buNone/>
+            </a:pPr>
+            <a:r>
+              <a:rPr lang="en-US" sz="2400" dirty="0">
+                <a:solidFill>
+                  <a:srgbClr val="00B050"/>
+                </a:solidFill>
+              </a:rPr>
+              <a:t>  display: flex;  /*  tell the browser your using flex */</a:t>
+            </a:r>
+          </a:p>
+          <a:p>
+            <a:pPr marL="457200" lvl="2" indent="0">
+              <a:spcBef>
+                <a:spcPts val="0"/>
+              </a:spcBef>
+              <a:buNone/>
+            </a:pPr>
+            <a:r>
+              <a:rPr lang="en-US" sz="2400" dirty="0">
+                <a:solidFill>
+                  <a:srgbClr val="00B050"/>
+                </a:solidFill>
+              </a:rPr>
+              <a:t>  flex-direction: column;   /* set the direction of main axis, default is row*/</a:t>
+            </a:r>
+          </a:p>
+          <a:p>
+            <a:pPr marL="457200" lvl="2" indent="0">
+              <a:spcBef>
+                <a:spcPts val="0"/>
+              </a:spcBef>
+              <a:buNone/>
+            </a:pPr>
+            <a:r>
+              <a:rPr lang="en-US" sz="2400" dirty="0">
+                <a:solidFill>
+                  <a:srgbClr val="00B050"/>
+                </a:solidFill>
+              </a:rPr>
+              <a:t>  justify-content: flex-start;   /* set how things line up on the main axis */</a:t>
+            </a:r>
+          </a:p>
+          <a:p>
+            <a:pPr marL="457200" lvl="2" indent="0">
+              <a:spcBef>
+                <a:spcPts val="0"/>
+              </a:spcBef>
+              <a:buNone/>
+            </a:pPr>
+            <a:r>
+              <a:rPr lang="en-US" sz="2400" dirty="0">
+                <a:solidFill>
+                  <a:srgbClr val="00B050"/>
+                </a:solidFill>
+              </a:rPr>
+              <a:t>  align-items: center;     /* set how things line up on the cross axis */</a:t>
+            </a:r>
+          </a:p>
+          <a:p>
+            <a:pPr marL="457200" lvl="2" indent="0">
+              <a:spcBef>
+                <a:spcPts val="0"/>
+              </a:spcBef>
+              <a:buNone/>
+            </a:pPr>
+            <a:r>
+              <a:rPr lang="en-US" sz="2400" dirty="0">
+                <a:solidFill>
+                  <a:srgbClr val="00B050"/>
+                </a:solidFill>
+              </a:rPr>
+              <a:t>  box-sizing: border-box;    /* width and </a:t>
+            </a:r>
+            <a:r>
+              <a:rPr lang="en-US" sz="2400">
+                <a:solidFill>
+                  <a:srgbClr val="00B050"/>
+                </a:solidFill>
+              </a:rPr>
+              <a:t>height include </a:t>
+            </a:r>
+            <a:r>
+              <a:rPr lang="en-US" sz="2400" dirty="0">
+                <a:solidFill>
+                  <a:srgbClr val="00B050"/>
+                </a:solidFill>
+              </a:rPr>
+              <a:t>padding and border*/ </a:t>
+            </a:r>
+          </a:p>
+          <a:p>
+            <a:pPr>
+              <a:spcBef>
+                <a:spcPts val="0"/>
+              </a:spcBef>
+              <a:buFont typeface="Wingdings" panose="05000000000000000000" pitchFamily="2" charset="2"/>
+              <a:buChar char="Ø"/>
+            </a:pPr>
+            <a:r>
+              <a:rPr lang="en-US" sz="2800" dirty="0">
+                <a:solidFill>
+                  <a:srgbClr val="0070C0"/>
+                </a:solidFill>
+              </a:rPr>
+              <a:t>}</a:t>
+            </a:r>
+          </a:p>
+        </p:txBody>
+      </p:sp>
+    </p:spTree>
+    <p:extLst>
+      <p:ext uri="{BB962C8B-B14F-4D97-AF65-F5344CB8AC3E}">
+        <p14:creationId xmlns:p14="http://schemas.microsoft.com/office/powerpoint/2010/main" val="769394946"/>
       </p:ext>
     </p:extLst>
   </p:cSld>
@@ -17800,6 +18271,187 @@
           <p:cNvPr id="2" name="Title 1">
             <a:extLst>
               <a:ext uri="{FF2B5EF4-FFF2-40B4-BE49-F238E27FC236}">
+                <a16:creationId xmlns:a16="http://schemas.microsoft.com/office/drawing/2014/main" id="{07FF0E22-7853-E22A-38FE-C0F8754E1955}"/>
+              </a:ext>
+            </a:extLst>
+          </p:cNvPr>
+          <p:cNvSpPr>
+            <a:spLocks noGrp="1"/>
+          </p:cNvSpPr>
+          <p:nvPr>
+            <p:ph type="title"/>
+          </p:nvPr>
+        </p:nvSpPr>
+        <p:spPr/>
+        <p:txBody>
+          <a:bodyPr/>
+          <a:lstStyle/>
+          <a:p>
+            <a:r>
+              <a:rPr lang="en-US" dirty="0"/>
+              <a:t>Important Architecture Note, Global Properties</a:t>
+            </a:r>
+          </a:p>
+        </p:txBody>
+      </p:sp>
+      <p:sp>
+        <p:nvSpPr>
+          <p:cNvPr id="3" name="Content Placeholder 2">
+            <a:extLst>
+              <a:ext uri="{FF2B5EF4-FFF2-40B4-BE49-F238E27FC236}">
+                <a16:creationId xmlns:a16="http://schemas.microsoft.com/office/drawing/2014/main" id="{95F3D142-3D3E-D7CA-63D7-BC2A466E6D1F}"/>
+              </a:ext>
+            </a:extLst>
+          </p:cNvPr>
+          <p:cNvSpPr>
+            <a:spLocks noGrp="1"/>
+          </p:cNvSpPr>
+          <p:nvPr>
+            <p:ph idx="1"/>
+          </p:nvPr>
+        </p:nvSpPr>
+        <p:spPr>
+          <a:xfrm>
+            <a:off x="769620" y="1252728"/>
+            <a:ext cx="10652760" cy="4901184"/>
+          </a:xfrm>
+        </p:spPr>
+        <p:txBody>
+          <a:bodyPr>
+            <a:normAutofit/>
+          </a:bodyPr>
+          <a:lstStyle/>
+          <a:p>
+            <a:pPr marL="0" indent="0">
+              <a:spcBef>
+                <a:spcPts val="0"/>
+              </a:spcBef>
+              <a:buNone/>
+            </a:pPr>
+            <a:r>
+              <a:rPr lang="en-US" sz="2400" dirty="0"/>
+              <a:t>Frustration happens when conflicting styles are created and fight for precedence inside the browser. Define global styles </a:t>
+            </a:r>
+            <a:r>
+              <a:rPr lang="en-US" sz="2400" u="sng" dirty="0"/>
+              <a:t>first</a:t>
+            </a:r>
+            <a:r>
+              <a:rPr lang="en-US" sz="2400" dirty="0"/>
+              <a:t> with purpose.</a:t>
+            </a:r>
+          </a:p>
+          <a:p>
+            <a:pPr marL="0" indent="0">
+              <a:spcBef>
+                <a:spcPts val="0"/>
+              </a:spcBef>
+              <a:buNone/>
+            </a:pPr>
+            <a:endParaRPr lang="en-US" sz="2400" dirty="0"/>
+          </a:p>
+          <a:p>
+            <a:pPr marL="0" indent="0">
+              <a:spcBef>
+                <a:spcPts val="0"/>
+              </a:spcBef>
+              <a:buNone/>
+            </a:pPr>
+            <a:r>
+              <a:rPr lang="en-US" sz="2400" dirty="0"/>
+              <a:t>In </a:t>
+            </a:r>
+            <a:r>
+              <a:rPr lang="en-US" sz="2400" dirty="0" err="1"/>
+              <a:t>css</a:t>
+            </a:r>
+            <a:r>
+              <a:rPr lang="en-US" sz="2400" dirty="0"/>
+              <a:t>-layout-workshop I have in index.css </a:t>
+            </a:r>
+            <a:r>
+              <a:rPr lang="en-US" sz="2400" b="1" dirty="0"/>
+              <a:t>* {box-sizing: border-box;}  </a:t>
+            </a:r>
+            <a:r>
+              <a:rPr lang="en-US" sz="2400" dirty="0"/>
+              <a:t>That means I have assigned the property border-box to every class in the app. That is why it’s defined in the slides and not in every class I create. If I don’t want border-box I have to override it. If I have a </a:t>
+            </a:r>
+            <a:r>
+              <a:rPr lang="en-US" sz="2400" dirty="0" err="1"/>
+              <a:t>svg</a:t>
+            </a:r>
+            <a:r>
+              <a:rPr lang="en-US" sz="2400" dirty="0"/>
+              <a:t> logo, it needs to scale without borders or anything else, so change it</a:t>
+            </a:r>
+          </a:p>
+          <a:p>
+            <a:pPr marL="0" indent="0">
+              <a:spcBef>
+                <a:spcPts val="0"/>
+              </a:spcBef>
+              <a:buNone/>
+            </a:pPr>
+            <a:r>
+              <a:rPr lang="en-US" sz="2400" dirty="0"/>
+              <a:t>to  </a:t>
+            </a:r>
+            <a:r>
+              <a:rPr lang="en-US" sz="2400" b="1" dirty="0"/>
+              <a:t>.</a:t>
+            </a:r>
+            <a:r>
+              <a:rPr lang="en-US" sz="2400" b="1" dirty="0" err="1"/>
+              <a:t>svgImg</a:t>
+            </a:r>
+            <a:r>
+              <a:rPr lang="en-US" sz="2400" b="1" dirty="0"/>
+              <a:t> {box-sizing: content-box}   </a:t>
+            </a:r>
+            <a:r>
+              <a:rPr lang="en-US" sz="2400" dirty="0"/>
+              <a:t>for that class.</a:t>
+            </a:r>
+            <a:endParaRPr lang="en-US" sz="2400" b="1" dirty="0"/>
+          </a:p>
+        </p:txBody>
+      </p:sp>
+    </p:spTree>
+    <p:extLst>
+      <p:ext uri="{BB962C8B-B14F-4D97-AF65-F5344CB8AC3E}">
+        <p14:creationId xmlns:p14="http://schemas.microsoft.com/office/powerpoint/2010/main" val="2301656891"/>
+      </p:ext>
+    </p:extLst>
+  </p:cSld>
+  <p:clrMapOvr>
+    <a:masterClrMapping/>
+  </p:clrMapOvr>
+</p:sld>
+</file>
+
+<file path=ppt/slides/slide4.xml><?xml version="1.0" encoding="utf-8"?>
+<p:sld xmlns:a="http://schemas.openxmlformats.org/drawingml/2006/main" xmlns:r="http://schemas.openxmlformats.org/officeDocument/2006/relationships" xmlns:p="http://schemas.openxmlformats.org/presentationml/2006/main">
+  <p:cSld>
+    <p:spTree>
+      <p:nvGrpSpPr>
+        <p:cNvPr id="1" name=""/>
+        <p:cNvGrpSpPr/>
+        <p:nvPr/>
+      </p:nvGrpSpPr>
+      <p:grpSpPr>
+        <a:xfrm>
+          <a:off x="0" y="0"/>
+          <a:ext cx="0" cy="0"/>
+          <a:chOff x="0" y="0"/>
+          <a:chExt cx="0" cy="0"/>
+        </a:xfrm>
+      </p:grpSpPr>
+      <p:sp>
+        <p:nvSpPr>
+          <p:cNvPr id="2" name="Title 1">
+            <a:extLst>
+              <a:ext uri="{FF2B5EF4-FFF2-40B4-BE49-F238E27FC236}">
                 <a16:creationId xmlns:a16="http://schemas.microsoft.com/office/drawing/2014/main" id="{3E55F0A0-0663-BC84-89B0-FF3BD9DE9693}"/>
               </a:ext>
             </a:extLst>
@@ -18335,243 +18987,6 @@
 </p:sld>
 </file>
 
-<file path=ppt/slides/slide4.xml><?xml version="1.0" encoding="utf-8"?>
-<p:sld xmlns:a="http://schemas.openxmlformats.org/drawingml/2006/main" xmlns:r="http://schemas.openxmlformats.org/officeDocument/2006/relationships" xmlns:p="http://schemas.openxmlformats.org/presentationml/2006/main">
-  <p:cSld>
-    <p:spTree>
-      <p:nvGrpSpPr>
-        <p:cNvPr id="1" name=""/>
-        <p:cNvGrpSpPr/>
-        <p:nvPr/>
-      </p:nvGrpSpPr>
-      <p:grpSpPr>
-        <a:xfrm>
-          <a:off x="0" y="0"/>
-          <a:ext cx="0" cy="0"/>
-          <a:chOff x="0" y="0"/>
-          <a:chExt cx="0" cy="0"/>
-        </a:xfrm>
-      </p:grpSpPr>
-      <p:sp>
-        <p:nvSpPr>
-          <p:cNvPr id="2" name="Title 1">
-            <a:extLst>
-              <a:ext uri="{FF2B5EF4-FFF2-40B4-BE49-F238E27FC236}">
-                <a16:creationId xmlns:a16="http://schemas.microsoft.com/office/drawing/2014/main" id="{45EEF7ED-2E17-A394-14A9-C1CF7D4D3ACE}"/>
-              </a:ext>
-            </a:extLst>
-          </p:cNvPr>
-          <p:cNvSpPr>
-            <a:spLocks noGrp="1"/>
-          </p:cNvSpPr>
-          <p:nvPr>
-            <p:ph type="title"/>
-          </p:nvPr>
-        </p:nvSpPr>
-        <p:spPr/>
-        <p:txBody>
-          <a:bodyPr/>
-          <a:lstStyle/>
-          <a:p>
-            <a:r>
-              <a:rPr lang="en-US" dirty="0"/>
-              <a:t>Some Key Concepts</a:t>
-            </a:r>
-          </a:p>
-        </p:txBody>
-      </p:sp>
-      <p:sp>
-        <p:nvSpPr>
-          <p:cNvPr id="3" name="Content Placeholder 2">
-            <a:extLst>
-              <a:ext uri="{FF2B5EF4-FFF2-40B4-BE49-F238E27FC236}">
-                <a16:creationId xmlns:a16="http://schemas.microsoft.com/office/drawing/2014/main" id="{8AF7D69F-D803-E98B-A27D-ECC8918275F4}"/>
-              </a:ext>
-            </a:extLst>
-          </p:cNvPr>
-          <p:cNvSpPr>
-            <a:spLocks noGrp="1"/>
-          </p:cNvSpPr>
-          <p:nvPr>
-            <p:ph idx="1"/>
-          </p:nvPr>
-        </p:nvSpPr>
-        <p:spPr>
-          <a:xfrm>
-            <a:off x="1932820" y="1252728"/>
-            <a:ext cx="7646656" cy="5096314"/>
-          </a:xfrm>
-        </p:spPr>
-        <p:txBody>
-          <a:bodyPr>
-            <a:normAutofit/>
-          </a:bodyPr>
-          <a:lstStyle/>
-          <a:p>
-            <a:r>
-              <a:rPr lang="en-US" dirty="0"/>
-              <a:t>Grid is </a:t>
-            </a:r>
-            <a:r>
-              <a:rPr lang="en-US" b="1" dirty="0"/>
-              <a:t>two-dimensional</a:t>
-            </a:r>
-            <a:r>
-              <a:rPr lang="en-US" dirty="0"/>
-              <a:t> (rows and columns).</a:t>
-            </a:r>
-          </a:p>
-          <a:p>
-            <a:r>
-              <a:rPr lang="en-US" dirty="0"/>
-              <a:t>grid-template-columns defines column tracks.</a:t>
-            </a:r>
-          </a:p>
-          <a:p>
-            <a:r>
-              <a:rPr lang="en-US" dirty="0"/>
-              <a:t>grid-template-rows defines row tracks.</a:t>
-            </a:r>
-          </a:p>
-          <a:p>
-            <a:r>
-              <a:rPr lang="en-US" dirty="0"/>
-              <a:t>gap controls spacing between tracks.</a:t>
-            </a:r>
-          </a:p>
-          <a:p>
-            <a:r>
-              <a:rPr lang="en-US" dirty="0"/>
-              <a:t>grid-column and grid-row control placement.</a:t>
-            </a:r>
-          </a:p>
-          <a:p>
-            <a:r>
-              <a:rPr lang="en-US" dirty="0"/>
-              <a:t>grid-template-areas allows named layout regions like this:</a:t>
-            </a:r>
-          </a:p>
-          <a:p>
-            <a:endParaRPr lang="en-US" dirty="0"/>
-          </a:p>
-          <a:p>
-            <a:pPr marL="0" indent="0">
-              <a:spcBef>
-                <a:spcPts val="0"/>
-              </a:spcBef>
-              <a:buNone/>
-            </a:pPr>
-            <a:r>
-              <a:rPr lang="en-US" sz="2000" dirty="0"/>
-              <a:t>grid-template-areas:</a:t>
-            </a:r>
-          </a:p>
-          <a:p>
-            <a:pPr marL="0" indent="0">
-              <a:spcBef>
-                <a:spcPts val="0"/>
-              </a:spcBef>
-              <a:buNone/>
-            </a:pPr>
-            <a:r>
-              <a:rPr lang="en-US" sz="2000" dirty="0"/>
-              <a:t>   "header </a:t>
-            </a:r>
-            <a:r>
-              <a:rPr lang="en-US" sz="2000" dirty="0" err="1"/>
-              <a:t>header</a:t>
-            </a:r>
-            <a:r>
-              <a:rPr lang="en-US" sz="2000" dirty="0"/>
-              <a:t> </a:t>
-            </a:r>
-            <a:r>
-              <a:rPr lang="en-US" sz="2000" dirty="0" err="1"/>
-              <a:t>header</a:t>
-            </a:r>
-            <a:r>
-              <a:rPr lang="en-US" sz="2000" dirty="0"/>
-              <a:t>“</a:t>
-            </a:r>
-          </a:p>
-          <a:p>
-            <a:pPr marL="0" indent="0">
-              <a:spcBef>
-                <a:spcPts val="0"/>
-              </a:spcBef>
-              <a:buNone/>
-            </a:pPr>
-            <a:r>
-              <a:rPr lang="en-US" sz="2000" dirty="0"/>
-              <a:t>    "content </a:t>
-            </a:r>
-            <a:r>
-              <a:rPr lang="en-US" sz="2000" dirty="0" err="1"/>
-              <a:t>content</a:t>
-            </a:r>
-            <a:r>
-              <a:rPr lang="en-US" sz="2000" dirty="0"/>
-              <a:t> sidebar“</a:t>
-            </a:r>
-          </a:p>
-          <a:p>
-            <a:pPr marL="0" indent="0">
-              <a:spcBef>
-                <a:spcPts val="0"/>
-              </a:spcBef>
-              <a:buNone/>
-            </a:pPr>
-            <a:r>
-              <a:rPr lang="en-US" sz="2000" dirty="0"/>
-              <a:t>    "footer </a:t>
-            </a:r>
-            <a:r>
-              <a:rPr lang="en-US" sz="2000" dirty="0" err="1"/>
-              <a:t>footer</a:t>
-            </a:r>
-            <a:r>
-              <a:rPr lang="en-US" sz="2000" dirty="0"/>
-              <a:t> </a:t>
-            </a:r>
-            <a:r>
-              <a:rPr lang="en-US" sz="2000" dirty="0" err="1"/>
-              <a:t>footer</a:t>
-            </a:r>
-            <a:r>
-              <a:rPr lang="en-US" sz="2000" dirty="0"/>
-              <a:t>";</a:t>
-            </a:r>
-          </a:p>
-          <a:p>
-            <a:endParaRPr lang="en-US" dirty="0"/>
-          </a:p>
-          <a:p>
-            <a:pPr marL="0" indent="0">
-              <a:buNone/>
-            </a:pPr>
-            <a:endParaRPr lang="en-US" dirty="0"/>
-          </a:p>
-          <a:p>
-            <a:pPr marL="0" indent="0">
-              <a:buNone/>
-            </a:pPr>
-            <a:endParaRPr lang="en-US" dirty="0"/>
-          </a:p>
-        </p:txBody>
-      </p:sp>
-    </p:spTree>
-    <p:extLst>
-      <p:ext uri="{BB962C8B-B14F-4D97-AF65-F5344CB8AC3E}">
-        <p14:creationId xmlns:p14="http://schemas.microsoft.com/office/powerpoint/2010/main" val="3724052996"/>
-      </p:ext>
-    </p:extLst>
-  </p:cSld>
-  <p:clrMapOvr>
-    <a:masterClrMapping/>
-  </p:clrMapOvr>
-</p:sld>
-</file>
-
 <file path=ppt/slides/slide5.xml><?xml version="1.0" encoding="utf-8"?>
 <p:sld xmlns:a="http://schemas.openxmlformats.org/drawingml/2006/main" xmlns:r="http://schemas.openxmlformats.org/officeDocument/2006/relationships" xmlns:p="http://schemas.openxmlformats.org/presentationml/2006/main">
   <p:cSld>
@@ -18591,10 +19006,38 @@
       </p:grpSpPr>
       <p:sp>
         <p:nvSpPr>
+          <p:cNvPr id="2" name="Title 1">
+            <a:extLst>
+              <a:ext uri="{FF2B5EF4-FFF2-40B4-BE49-F238E27FC236}">
+                <a16:creationId xmlns:a16="http://schemas.microsoft.com/office/drawing/2014/main" id="{45EEF7ED-2E17-A394-14A9-C1CF7D4D3ACE}"/>
+              </a:ext>
+            </a:extLst>
+          </p:cNvPr>
+          <p:cNvSpPr>
+            <a:spLocks noGrp="1"/>
+          </p:cNvSpPr>
+          <p:nvPr>
+            <p:ph type="title"/>
+          </p:nvPr>
+        </p:nvSpPr>
+        <p:spPr/>
+        <p:txBody>
+          <a:bodyPr/>
+          <a:lstStyle/>
+          <a:p>
+            <a:r>
+              <a:rPr lang="en-US" dirty="0"/>
+              <a:t>Some Key Concepts</a:t>
+            </a:r>
+          </a:p>
+        </p:txBody>
+      </p:sp>
+      <p:sp>
+        <p:nvSpPr>
           <p:cNvPr id="3" name="Content Placeholder 2">
             <a:extLst>
               <a:ext uri="{FF2B5EF4-FFF2-40B4-BE49-F238E27FC236}">
-                <a16:creationId xmlns:a16="http://schemas.microsoft.com/office/drawing/2014/main" id="{174F59E5-0957-22C2-983B-5CA42B5F9062}"/>
+                <a16:creationId xmlns:a16="http://schemas.microsoft.com/office/drawing/2014/main" id="{8AF7D69F-D803-E98B-A27D-ECC8918275F4}"/>
               </a:ext>
             </a:extLst>
           </p:cNvPr>
@@ -18607,120 +19050,171 @@
         </p:nvSpPr>
         <p:spPr>
           <a:xfrm>
-            <a:off x="769620" y="978408"/>
-            <a:ext cx="10652760" cy="4901184"/>
+            <a:off x="1932820" y="1252728"/>
+            <a:ext cx="7646656" cy="5096314"/>
           </a:xfrm>
         </p:spPr>
         <p:txBody>
-          <a:bodyPr/>
+          <a:bodyPr>
+            <a:normAutofit/>
+          </a:bodyPr>
           <a:lstStyle/>
           <a:p>
+            <a:r>
+              <a:rPr lang="en-US" dirty="0"/>
+              <a:t>Grid is </a:t>
+            </a:r>
+            <a:r>
+              <a:rPr lang="en-US" b="1" dirty="0"/>
+              <a:t>two-dimensional</a:t>
+            </a:r>
+            <a:r>
+              <a:rPr lang="en-US" dirty="0"/>
+              <a:t> (rows and columns).</a:t>
+            </a:r>
+          </a:p>
+          <a:p>
+            <a:r>
+              <a:rPr lang="en-US" dirty="0"/>
+              <a:t>grid-template-columns defines column tracks.</a:t>
+            </a:r>
+          </a:p>
+          <a:p>
+            <a:r>
+              <a:rPr lang="en-US" dirty="0"/>
+              <a:t>grid-template-rows defines row tracks.</a:t>
+            </a:r>
+          </a:p>
+          <a:p>
+            <a:r>
+              <a:rPr lang="en-US" dirty="0"/>
+              <a:t>gap controls spacing between tracks.</a:t>
+            </a:r>
+          </a:p>
+          <a:p>
+            <a:r>
+              <a:rPr lang="en-US" dirty="0"/>
+              <a:t>grid-column and grid-row control placement.</a:t>
+            </a:r>
+          </a:p>
+          <a:p>
+            <a:r>
+              <a:rPr lang="en-US" dirty="0"/>
+              <a:t>grid-template-areas allows named layout regions like this:</a:t>
+            </a:r>
+          </a:p>
+          <a:p>
+            <a:endParaRPr lang="en-US" dirty="0"/>
+          </a:p>
+          <a:p>
             <a:pPr marL="0" indent="0">
-              <a:buNone/>
-            </a:pPr>
-            <a:r>
-              <a:rPr lang="en-US" sz="2000" dirty="0"/>
-              <a:t>Flexbox is intuitive once you understand axes.</a:t>
-            </a:r>
-            <a:br>
-              <a:rPr lang="en-US" sz="2000" dirty="0"/>
-            </a:br>
-            <a:r>
-              <a:rPr lang="en-US" sz="2000" dirty="0"/>
-              <a:t>It works great for distributing and aligning content within a single dimension. You can set up a layout with just a few lines of code</a:t>
-            </a:r>
-            <a:r>
-              <a:rPr lang="en-US" dirty="0"/>
-              <a:t>.</a:t>
-            </a:r>
-          </a:p>
-          <a:p>
-            <a:pPr marL="0" indent="0">
-              <a:buNone/>
-            </a:pPr>
-            <a:r>
-              <a:rPr lang="en-US" sz="2200" dirty="0"/>
-              <a:t>display: flex;</a:t>
-            </a:r>
-          </a:p>
-          <a:p>
-            <a:pPr marL="0" indent="0">
-              <a:lnSpc>
-                <a:spcPct val="100000"/>
-              </a:lnSpc>
               <a:spcBef>
                 <a:spcPts val="0"/>
               </a:spcBef>
               <a:buNone/>
             </a:pPr>
             <a:r>
-              <a:rPr lang="en-US" sz="2200" dirty="0"/>
-              <a:t>flex-direction: column;</a:t>
+              <a:rPr lang="en-US" sz="2000" dirty="0"/>
+              <a:t>grid-template-areas:</a:t>
             </a:r>
           </a:p>
           <a:p>
             <a:pPr marL="0" indent="0">
-              <a:lnSpc>
-                <a:spcPct val="100000"/>
-              </a:lnSpc>
               <a:spcBef>
                 <a:spcPts val="0"/>
               </a:spcBef>
               <a:buNone/>
             </a:pPr>
             <a:r>
-              <a:rPr lang="en-US" sz="2200" dirty="0"/>
-              <a:t>justify-content: space-between;</a:t>
+              <a:rPr lang="en-US" sz="2000" dirty="0"/>
+              <a:t>   "header </a:t>
+            </a:r>
+            <a:r>
+              <a:rPr lang="en-US" sz="2000" dirty="0" err="1"/>
+              <a:t>header</a:t>
+            </a:r>
+            <a:r>
+              <a:rPr lang="en-US" sz="2000" dirty="0"/>
+              <a:t> </a:t>
+            </a:r>
+            <a:r>
+              <a:rPr lang="en-US" sz="2000" dirty="0" err="1"/>
+              <a:t>header</a:t>
+            </a:r>
+            <a:r>
+              <a:rPr lang="en-US" sz="2000" dirty="0"/>
+              <a:t>“</a:t>
             </a:r>
           </a:p>
           <a:p>
             <a:pPr marL="0" indent="0">
-              <a:lnSpc>
-                <a:spcPct val="100000"/>
-              </a:lnSpc>
               <a:spcBef>
                 <a:spcPts val="0"/>
               </a:spcBef>
               <a:buNone/>
             </a:pPr>
             <a:r>
-              <a:rPr lang="en-US" sz="2200" dirty="0"/>
-              <a:t>align-items: center;</a:t>
+              <a:rPr lang="en-US" sz="2000" dirty="0"/>
+              <a:t>    "content </a:t>
+            </a:r>
+            <a:r>
+              <a:rPr lang="en-US" sz="2000" dirty="0" err="1"/>
+              <a:t>content</a:t>
+            </a:r>
+            <a:r>
+              <a:rPr lang="en-US" sz="2000" dirty="0"/>
+              <a:t> sidebar“</a:t>
             </a:r>
           </a:p>
           <a:p>
             <a:pPr marL="0" indent="0">
-              <a:lnSpc>
-                <a:spcPct val="100000"/>
-              </a:lnSpc>
               <a:spcBef>
                 <a:spcPts val="0"/>
               </a:spcBef>
               <a:buNone/>
             </a:pPr>
-            <a:endParaRPr lang="en-US" sz="2200" dirty="0"/>
+            <a:r>
+              <a:rPr lang="en-US" sz="2000" dirty="0"/>
+              <a:t>    "footer </a:t>
+            </a:r>
+            <a:r>
+              <a:rPr lang="en-US" sz="2000" dirty="0" err="1"/>
+              <a:t>footer</a:t>
+            </a:r>
+            <a:r>
+              <a:rPr lang="en-US" sz="2000" dirty="0"/>
+              <a:t> </a:t>
+            </a:r>
+            <a:r>
+              <a:rPr lang="en-US" sz="2000" dirty="0" err="1"/>
+              <a:t>footer</a:t>
+            </a:r>
+            <a:r>
+              <a:rPr lang="en-US" sz="2000" dirty="0"/>
+              <a:t>";</a:t>
+            </a:r>
+          </a:p>
+          <a:p>
+            <a:endParaRPr lang="en-US" dirty="0"/>
           </a:p>
           <a:p>
             <a:pPr marL="0" indent="0">
-              <a:lnSpc>
-                <a:spcPct val="100000"/>
-              </a:lnSpc>
-              <a:spcBef>
-                <a:spcPts val="0"/>
-              </a:spcBef>
               <a:buNone/>
             </a:pPr>
-            <a:r>
-              <a:rPr lang="en-US" sz="2200" dirty="0"/>
-              <a:t>box-sizing: border-box</a:t>
-            </a:r>
+            <a:endParaRPr lang="en-US" dirty="0"/>
+          </a:p>
+          <a:p>
+            <a:pPr marL="0" indent="0">
+              <a:buNone/>
+            </a:pPr>
+            <a:endParaRPr lang="en-US" dirty="0"/>
           </a:p>
         </p:txBody>
       </p:sp>
     </p:spTree>
     <p:extLst>
       <p:ext uri="{BB962C8B-B14F-4D97-AF65-F5344CB8AC3E}">
-        <p14:creationId xmlns:p14="http://schemas.microsoft.com/office/powerpoint/2010/main" val="846437077"/>
+        <p14:creationId xmlns:p14="http://schemas.microsoft.com/office/powerpoint/2010/main" val="3724052996"/>
       </p:ext>
     </p:extLst>
   </p:cSld>
@@ -18752,7 +19246,7 @@
           <p:cNvPr id="3" name="Content Placeholder 2">
             <a:extLst>
               <a:ext uri="{FF2B5EF4-FFF2-40B4-BE49-F238E27FC236}">
-                <a16:creationId xmlns:a16="http://schemas.microsoft.com/office/drawing/2014/main" id="{2C6D6590-BA84-9DAB-141C-71B4B527894D}"/>
+                <a16:creationId xmlns:a16="http://schemas.microsoft.com/office/drawing/2014/main" id="{174F59E5-0957-22C2-983B-5CA42B5F9062}"/>
               </a:ext>
             </a:extLst>
           </p:cNvPr>
@@ -18777,184 +19271,108 @@
               <a:buNone/>
             </a:pPr>
             <a:r>
-              <a:rPr lang="en-US" dirty="0"/>
-              <a:t>That could be the overall structure of your app. Nested inside could be a products page laid out in a grid with hundreds or thousands of product pictures, descriptions, prices, shipping weight, color, and if its in stock with just eight lines. Or the overall structure could be Grid.</a:t>
+              <a:rPr lang="en-US" sz="2000" dirty="0"/>
+              <a:t>Flexbox is intuitive once you understand axes.</a:t>
+            </a:r>
+            <a:br>
+              <a:rPr lang="en-US" sz="2000" dirty="0"/>
+            </a:br>
+            <a:r>
+              <a:rPr lang="en-US" sz="2000" dirty="0"/>
+              <a:t>It works great for distributing and aligning content within a single dimension. You can set up a layout with just a few lines of code</a:t>
+            </a:r>
+            <a:r>
+              <a:rPr lang="en-US" dirty="0"/>
+              <a:t>.</a:t>
             </a:r>
           </a:p>
           <a:p>
             <a:pPr marL="0" indent="0">
               <a:buNone/>
             </a:pPr>
-            <a:endParaRPr lang="en-US" dirty="0"/>
+            <a:r>
+              <a:rPr lang="en-US" sz="2200" dirty="0"/>
+              <a:t>display: flex;</a:t>
+            </a:r>
           </a:p>
           <a:p>
             <a:pPr marL="0" indent="0">
+              <a:lnSpc>
+                <a:spcPct val="100000"/>
+              </a:lnSpc>
               <a:spcBef>
                 <a:spcPts val="0"/>
               </a:spcBef>
               <a:buNone/>
             </a:pPr>
             <a:r>
-              <a:rPr lang="en-US" dirty="0"/>
-              <a:t>  display: grid;</a:t>
+              <a:rPr lang="en-US" sz="2200" dirty="0"/>
+              <a:t>flex-direction: column;</a:t>
             </a:r>
           </a:p>
           <a:p>
             <a:pPr marL="0" indent="0">
+              <a:lnSpc>
+                <a:spcPct val="100000"/>
+              </a:lnSpc>
               <a:spcBef>
                 <a:spcPts val="0"/>
               </a:spcBef>
               <a:buNone/>
             </a:pPr>
             <a:r>
-              <a:rPr lang="en-US" dirty="0"/>
-              <a:t>  grid-template-columns: 220px 1fr </a:t>
-            </a:r>
-            <a:r>
-              <a:rPr lang="en-US" dirty="0" err="1"/>
-              <a:t>1fr</a:t>
-            </a:r>
-            <a:r>
-              <a:rPr lang="en-US" dirty="0"/>
-              <a:t>;</a:t>
+              <a:rPr lang="en-US" sz="2200" dirty="0"/>
+              <a:t>justify-content: space-between;</a:t>
             </a:r>
           </a:p>
           <a:p>
             <a:pPr marL="0" indent="0">
+              <a:lnSpc>
+                <a:spcPct val="100000"/>
+              </a:lnSpc>
               <a:spcBef>
                 <a:spcPts val="0"/>
               </a:spcBef>
               <a:buNone/>
             </a:pPr>
             <a:r>
-              <a:rPr lang="en-US" dirty="0"/>
-              <a:t>  grid-template-rows: 80px 240px 80px;</a:t>
+              <a:rPr lang="en-US" sz="2200" dirty="0"/>
+              <a:t>align-items: center;</a:t>
             </a:r>
           </a:p>
           <a:p>
             <a:pPr marL="0" indent="0">
+              <a:lnSpc>
+                <a:spcPct val="100000"/>
+              </a:lnSpc>
               <a:spcBef>
                 <a:spcPts val="0"/>
               </a:spcBef>
               <a:buNone/>
             </a:pPr>
-            <a:r>
-              <a:rPr lang="en-US" dirty="0"/>
-              <a:t>  gap: 10px;</a:t>
-            </a:r>
+            <a:endParaRPr lang="en-US" sz="2200" dirty="0"/>
           </a:p>
           <a:p>
             <a:pPr marL="0" indent="0">
+              <a:lnSpc>
+                <a:spcPct val="100000"/>
+              </a:lnSpc>
               <a:spcBef>
                 <a:spcPts val="0"/>
               </a:spcBef>
               <a:buNone/>
             </a:pPr>
             <a:r>
-              <a:rPr lang="en-US" dirty="0"/>
-              <a:t>  grid-template-areas:</a:t>
-            </a:r>
-          </a:p>
-          <a:p>
-            <a:pPr marL="0" indent="0">
-              <a:spcBef>
-                <a:spcPts val="0"/>
-              </a:spcBef>
-              <a:buNone/>
-            </a:pPr>
-            <a:r>
-              <a:rPr lang="en-US" dirty="0"/>
-              <a:t>    "header </a:t>
-            </a:r>
-            <a:r>
-              <a:rPr lang="en-US" dirty="0" err="1"/>
-              <a:t>header</a:t>
-            </a:r>
-            <a:r>
-              <a:rPr lang="en-US" dirty="0"/>
-              <a:t> </a:t>
-            </a:r>
-            <a:r>
-              <a:rPr lang="en-US" dirty="0" err="1"/>
-              <a:t>header</a:t>
-            </a:r>
-            <a:r>
-              <a:rPr lang="en-US" dirty="0"/>
-              <a:t>"</a:t>
-            </a:r>
-          </a:p>
-          <a:p>
-            <a:pPr marL="0" indent="0">
-              <a:spcBef>
-                <a:spcPts val="0"/>
-              </a:spcBef>
-              <a:buNone/>
-            </a:pPr>
-            <a:r>
-              <a:rPr lang="en-US" dirty="0"/>
-              <a:t>     "content </a:t>
-            </a:r>
-            <a:r>
-              <a:rPr lang="en-US" dirty="0" err="1"/>
-              <a:t>content</a:t>
-            </a:r>
-            <a:r>
-              <a:rPr lang="en-US" dirty="0"/>
-              <a:t> sidebar"</a:t>
-            </a:r>
-          </a:p>
-          <a:p>
-            <a:pPr marL="0" indent="0">
-              <a:spcBef>
-                <a:spcPts val="0"/>
-              </a:spcBef>
-              <a:buNone/>
-            </a:pPr>
-            <a:r>
-              <a:rPr lang="en-US" dirty="0"/>
-              <a:t>     "footer </a:t>
-            </a:r>
-            <a:r>
-              <a:rPr lang="en-US" dirty="0" err="1"/>
-              <a:t>footer</a:t>
-            </a:r>
-            <a:r>
-              <a:rPr lang="en-US" dirty="0"/>
-              <a:t> </a:t>
-            </a:r>
-            <a:r>
-              <a:rPr lang="en-US" dirty="0" err="1"/>
-              <a:t>footer</a:t>
-            </a:r>
-            <a:r>
-              <a:rPr lang="en-US" dirty="0"/>
-              <a:t>";</a:t>
-            </a:r>
-          </a:p>
-          <a:p>
-            <a:pPr marL="0" indent="0">
-              <a:spcBef>
-                <a:spcPts val="0"/>
-              </a:spcBef>
-              <a:buNone/>
-            </a:pPr>
-            <a:endParaRPr lang="en-US" dirty="0"/>
-          </a:p>
-          <a:p>
-            <a:pPr marL="0" indent="0">
-              <a:spcBef>
-                <a:spcPts val="0"/>
-              </a:spcBef>
-              <a:buNone/>
-            </a:pPr>
-            <a:endParaRPr lang="en-US" dirty="0"/>
+              <a:rPr lang="en-US" sz="2200" dirty="0"/>
+              <a:t>box-sizing: border-box</a:t>
+            </a:r>
           </a:p>
         </p:txBody>
       </p:sp>
     </p:spTree>
     <p:extLst>
       <p:ext uri="{BB962C8B-B14F-4D97-AF65-F5344CB8AC3E}">
-        <p14:creationId xmlns:p14="http://schemas.microsoft.com/office/powerpoint/2010/main" val="1207819209"/>
+        <p14:creationId xmlns:p14="http://schemas.microsoft.com/office/powerpoint/2010/main" val="846437077"/>
       </p:ext>
     </p:extLst>
   </p:cSld>
@@ -18983,38 +19401,10 @@
       </p:grpSpPr>
       <p:sp>
         <p:nvSpPr>
-          <p:cNvPr id="2" name="Title 1">
-            <a:extLst>
-              <a:ext uri="{FF2B5EF4-FFF2-40B4-BE49-F238E27FC236}">
-                <a16:creationId xmlns:a16="http://schemas.microsoft.com/office/drawing/2014/main" id="{DE89CBC7-C8B4-FDDF-7899-3B670FFEAB55}"/>
-              </a:ext>
-            </a:extLst>
-          </p:cNvPr>
-          <p:cNvSpPr>
-            <a:spLocks noGrp="1"/>
-          </p:cNvSpPr>
-          <p:nvPr>
-            <p:ph type="title"/>
-          </p:nvPr>
-        </p:nvSpPr>
-        <p:spPr/>
-        <p:txBody>
-          <a:bodyPr/>
-          <a:lstStyle/>
-          <a:p>
-            <a:r>
-              <a:rPr lang="en-US" dirty="0"/>
-              <a:t>Moving boxes around</a:t>
-            </a:r>
-          </a:p>
-        </p:txBody>
-      </p:sp>
-      <p:sp>
-        <p:nvSpPr>
           <p:cNvPr id="3" name="Content Placeholder 2">
             <a:extLst>
               <a:ext uri="{FF2B5EF4-FFF2-40B4-BE49-F238E27FC236}">
-                <a16:creationId xmlns:a16="http://schemas.microsoft.com/office/drawing/2014/main" id="{F109F0E0-AAAA-973A-AB32-D09034329460}"/>
+                <a16:creationId xmlns:a16="http://schemas.microsoft.com/office/drawing/2014/main" id="{2C6D6590-BA84-9DAB-141C-71B4B527894D}"/>
               </a:ext>
             </a:extLst>
           </p:cNvPr>
@@ -19027,8 +19417,8 @@
         </p:nvSpPr>
         <p:spPr>
           <a:xfrm>
-            <a:off x="769620" y="1415681"/>
-            <a:ext cx="10652760" cy="4026638"/>
+            <a:off x="769620" y="978408"/>
+            <a:ext cx="10652760" cy="4901184"/>
           </a:xfrm>
         </p:spPr>
         <p:txBody>
@@ -19040,32 +19430,183 @@
             </a:pPr>
             <a:r>
               <a:rPr lang="en-US" dirty="0"/>
-              <a:t>Moving boxes around helps to </a:t>
-            </a:r>
-            <a:r>
-              <a:rPr lang="en-US" dirty="0" err="1"/>
-              <a:t>inderstand</a:t>
-            </a:r>
-            <a:r>
-              <a:rPr lang="en-US" dirty="0"/>
-              <a:t> how layouts work with flexbox and grid. Think of a big box that holds little boxes that holds stuff. First you tell the big box (.container or .wrapper) how to arrange the little boxes (.item or .header).Then tell how to arrange the stuff that’s in the little boxes.</a:t>
+              <a:t>That could be the overall structure of your app. Nested inside could be a products page laid out in a grid with hundreds or thousands of product pictures, descriptions, prices, shipping weight, color, and if its in stock with just eight lines. Or the overall structure could be Grid.</a:t>
             </a:r>
           </a:p>
           <a:p>
             <a:pPr marL="0" indent="0">
               <a:buNone/>
             </a:pPr>
-            <a:r>
-              <a:rPr lang="en-US" dirty="0"/>
-              <a:t>If it makes sense to use a grid that’s what you should use. If you’re using grid and fighting with rows and columns you should switch to flex, its that simple. </a:t>
-            </a:r>
+            <a:endParaRPr lang="en-US" dirty="0"/>
+          </a:p>
+          <a:p>
+            <a:pPr marL="0" indent="0">
+              <a:spcBef>
+                <a:spcPts val="0"/>
+              </a:spcBef>
+              <a:buNone/>
+            </a:pPr>
+            <a:r>
+              <a:rPr lang="en-US" dirty="0"/>
+              <a:t>  display: grid;</a:t>
+            </a:r>
+          </a:p>
+          <a:p>
+            <a:pPr marL="0" indent="0">
+              <a:spcBef>
+                <a:spcPts val="0"/>
+              </a:spcBef>
+              <a:buNone/>
+            </a:pPr>
+            <a:r>
+              <a:rPr lang="en-US" dirty="0"/>
+              <a:t>  grid-template-columns: 220px 1fr </a:t>
+            </a:r>
+            <a:r>
+              <a:rPr lang="en-US" dirty="0" err="1"/>
+              <a:t>1fr</a:t>
+            </a:r>
+            <a:r>
+              <a:rPr lang="en-US" dirty="0"/>
+              <a:t>;</a:t>
+            </a:r>
+          </a:p>
+          <a:p>
+            <a:pPr marL="0" indent="0">
+              <a:spcBef>
+                <a:spcPts val="0"/>
+              </a:spcBef>
+              <a:buNone/>
+            </a:pPr>
+            <a:r>
+              <a:rPr lang="en-US" dirty="0"/>
+              <a:t>  grid-template-rows: 80px 240px 80px;</a:t>
+            </a:r>
+          </a:p>
+          <a:p>
+            <a:pPr marL="0" indent="0">
+              <a:spcBef>
+                <a:spcPts val="0"/>
+              </a:spcBef>
+              <a:buNone/>
+            </a:pPr>
+            <a:r>
+              <a:rPr lang="en-US" dirty="0"/>
+              <a:t>  gap: 10px;</a:t>
+            </a:r>
+          </a:p>
+          <a:p>
+            <a:pPr marL="0" indent="0">
+              <a:spcBef>
+                <a:spcPts val="0"/>
+              </a:spcBef>
+              <a:buNone/>
+            </a:pPr>
+            <a:r>
+              <a:rPr lang="en-US" dirty="0"/>
+              <a:t>  grid-template-areas:</a:t>
+            </a:r>
+          </a:p>
+          <a:p>
+            <a:pPr marL="0" indent="0">
+              <a:spcBef>
+                <a:spcPts val="0"/>
+              </a:spcBef>
+              <a:buNone/>
+            </a:pPr>
+            <a:r>
+              <a:rPr lang="en-US" dirty="0"/>
+              <a:t>    "header </a:t>
+            </a:r>
+            <a:r>
+              <a:rPr lang="en-US" dirty="0" err="1"/>
+              <a:t>header</a:t>
+            </a:r>
+            <a:r>
+              <a:rPr lang="en-US" dirty="0"/>
+              <a:t> </a:t>
+            </a:r>
+            <a:r>
+              <a:rPr lang="en-US" dirty="0" err="1"/>
+              <a:t>header</a:t>
+            </a:r>
+            <a:r>
+              <a:rPr lang="en-US" dirty="0"/>
+              <a:t>"</a:t>
+            </a:r>
+          </a:p>
+          <a:p>
+            <a:pPr marL="0" indent="0">
+              <a:spcBef>
+                <a:spcPts val="0"/>
+              </a:spcBef>
+              <a:buNone/>
+            </a:pPr>
+            <a:r>
+              <a:rPr lang="en-US" dirty="0"/>
+              <a:t>     "content </a:t>
+            </a:r>
+            <a:r>
+              <a:rPr lang="en-US" dirty="0" err="1"/>
+              <a:t>content</a:t>
+            </a:r>
+            <a:r>
+              <a:rPr lang="en-US" dirty="0"/>
+              <a:t> sidebar"</a:t>
+            </a:r>
+          </a:p>
+          <a:p>
+            <a:pPr marL="0" indent="0">
+              <a:spcBef>
+                <a:spcPts val="0"/>
+              </a:spcBef>
+              <a:buNone/>
+            </a:pPr>
+            <a:r>
+              <a:rPr lang="en-US" dirty="0"/>
+              <a:t>     "footer </a:t>
+            </a:r>
+            <a:r>
+              <a:rPr lang="en-US" dirty="0" err="1"/>
+              <a:t>footer</a:t>
+            </a:r>
+            <a:r>
+              <a:rPr lang="en-US" dirty="0"/>
+              <a:t> </a:t>
+            </a:r>
+            <a:r>
+              <a:rPr lang="en-US" dirty="0" err="1"/>
+              <a:t>footer</a:t>
+            </a:r>
+            <a:r>
+              <a:rPr lang="en-US" dirty="0"/>
+              <a:t>";</a:t>
+            </a:r>
+          </a:p>
+          <a:p>
+            <a:pPr marL="0" indent="0">
+              <a:spcBef>
+                <a:spcPts val="0"/>
+              </a:spcBef>
+              <a:buNone/>
+            </a:pPr>
+            <a:endParaRPr lang="en-US" dirty="0"/>
+          </a:p>
+          <a:p>
+            <a:pPr marL="0" indent="0">
+              <a:spcBef>
+                <a:spcPts val="0"/>
+              </a:spcBef>
+              <a:buNone/>
+            </a:pPr>
+            <a:endParaRPr lang="en-US" dirty="0"/>
           </a:p>
         </p:txBody>
       </p:sp>
     </p:spTree>
     <p:extLst>
       <p:ext uri="{BB962C8B-B14F-4D97-AF65-F5344CB8AC3E}">
-        <p14:creationId xmlns:p14="http://schemas.microsoft.com/office/powerpoint/2010/main" val="1846155002"/>
+        <p14:creationId xmlns:p14="http://schemas.microsoft.com/office/powerpoint/2010/main" val="1207819209"/>
       </p:ext>
     </p:extLst>
   </p:cSld>
@@ -19097,7 +19638,7 @@
           <p:cNvPr id="2" name="Title 1">
             <a:extLst>
               <a:ext uri="{FF2B5EF4-FFF2-40B4-BE49-F238E27FC236}">
-                <a16:creationId xmlns:a16="http://schemas.microsoft.com/office/drawing/2014/main" id="{B75805CF-D467-57A4-6BF2-F2AF7F1E307B}"/>
+                <a16:creationId xmlns:a16="http://schemas.microsoft.com/office/drawing/2014/main" id="{DE89CBC7-C8B4-FDDF-7899-3B670FFEAB55}"/>
               </a:ext>
             </a:extLst>
           </p:cNvPr>
@@ -19106,53 +19647,44 @@
           </p:cNvSpPr>
           <p:nvPr>
             <p:ph type="title"/>
+          </p:nvPr>
+        </p:nvSpPr>
+        <p:spPr/>
+        <p:txBody>
+          <a:bodyPr/>
+          <a:lstStyle/>
+          <a:p>
+            <a:r>
+              <a:rPr lang="en-US" dirty="0"/>
+              <a:t>Moving boxes around</a:t>
+            </a:r>
+          </a:p>
+        </p:txBody>
+      </p:sp>
+      <p:sp>
+        <p:nvSpPr>
+          <p:cNvPr id="3" name="Content Placeholder 2">
+            <a:extLst>
+              <a:ext uri="{FF2B5EF4-FFF2-40B4-BE49-F238E27FC236}">
+                <a16:creationId xmlns:a16="http://schemas.microsoft.com/office/drawing/2014/main" id="{F109F0E0-AAAA-973A-AB32-D09034329460}"/>
+              </a:ext>
+            </a:extLst>
+          </p:cNvPr>
+          <p:cNvSpPr>
+            <a:spLocks noGrp="1"/>
+          </p:cNvSpPr>
+          <p:nvPr>
+            <p:ph idx="1"/>
           </p:nvPr>
         </p:nvSpPr>
         <p:spPr>
           <a:xfrm>
-            <a:off x="429768" y="283464"/>
-            <a:ext cx="10652760" cy="492913"/>
+            <a:off x="769620" y="1415681"/>
+            <a:ext cx="10652760" cy="4026638"/>
           </a:xfrm>
         </p:spPr>
         <p:txBody>
-          <a:bodyPr>
-            <a:normAutofit fontScale="90000"/>
-          </a:bodyPr>
-          <a:lstStyle/>
-          <a:p>
-            <a:r>
-              <a:rPr lang="en-US" dirty="0"/>
-              <a:t>Center a div</a:t>
-            </a:r>
-          </a:p>
-        </p:txBody>
-      </p:sp>
-      <p:sp>
-        <p:nvSpPr>
-          <p:cNvPr id="3" name="Content Placeholder 2">
-            <a:extLst>
-              <a:ext uri="{FF2B5EF4-FFF2-40B4-BE49-F238E27FC236}">
-                <a16:creationId xmlns:a16="http://schemas.microsoft.com/office/drawing/2014/main" id="{B3DC4752-161C-34E3-B0A7-A5EF63C91734}"/>
-              </a:ext>
-            </a:extLst>
-          </p:cNvPr>
-          <p:cNvSpPr>
-            <a:spLocks noGrp="1"/>
-          </p:cNvSpPr>
-          <p:nvPr>
-            <p:ph idx="1"/>
-          </p:nvPr>
-        </p:nvSpPr>
-        <p:spPr>
-          <a:xfrm>
-            <a:off x="895594" y="776377"/>
-            <a:ext cx="10652760" cy="5934974"/>
-          </a:xfrm>
-        </p:spPr>
-        <p:txBody>
-          <a:bodyPr>
-            <a:normAutofit/>
-          </a:bodyPr>
+          <a:bodyPr/>
           <a:lstStyle/>
           <a:p>
             <a:pPr marL="0" indent="0">
@@ -19160,15 +19692,15 @@
             </a:pPr>
             <a:r>
               <a:rPr lang="en-US" dirty="0"/>
-              <a:t>From now on when you see &lt;div </a:t>
+              <a:t>Moving boxes around helps to </a:t>
             </a:r>
             <a:r>
               <a:rPr lang="en-US" dirty="0" err="1"/>
-              <a:t>className</a:t>
-            </a:r>
-            <a:r>
-              <a:rPr lang="en-US" dirty="0"/>
-              <a:t>&gt; hello &lt;/div&gt; think box.</a:t>
+              <a:t>inderstand</a:t>
+            </a:r>
+            <a:r>
+              <a:rPr lang="en-US" dirty="0"/>
+              <a:t> how layouts work with flexbox and grid. Think of a big box that holds little boxes that holds stuff. First you tell the big box (.container or .wrapper) how to arrange the little boxes (.item or .header).Then tell how to arrange the stuff that’s in the little boxes.</a:t>
             </a:r>
           </a:p>
           <a:p>
@@ -19177,250 +19709,15 @@
             </a:pPr>
             <a:r>
               <a:rPr lang="en-US" dirty="0"/>
-              <a:t>Big box = container,  Little box = item</a:t>
-            </a:r>
-          </a:p>
-          <a:p>
-            <a:pPr marL="0" indent="0">
-              <a:buNone/>
-            </a:pPr>
-            <a:r>
-              <a:rPr lang="en-US" sz="1400" dirty="0"/>
-              <a:t>Thes two </a:t>
-            </a:r>
-            <a:r>
-              <a:rPr lang="en-US" sz="1400" dirty="0" err="1"/>
-              <a:t>css</a:t>
-            </a:r>
-            <a:r>
-              <a:rPr lang="en-US" sz="1400" dirty="0"/>
-              <a:t> classes will give you a grey box 500px wide with a blue box perfectly aligned in the center</a:t>
-            </a:r>
-          </a:p>
-          <a:p>
-            <a:pPr marL="0" indent="0">
-              <a:buNone/>
-            </a:pPr>
-            <a:r>
-              <a:rPr lang="en-US" sz="1400" dirty="0"/>
-              <a:t>.container {</a:t>
-            </a:r>
-          </a:p>
-          <a:p>
-            <a:pPr marL="0" indent="0">
-              <a:spcBef>
-                <a:spcPts val="0"/>
-              </a:spcBef>
-              <a:buNone/>
-            </a:pPr>
-            <a:r>
-              <a:rPr lang="en-US" sz="1400" dirty="0"/>
-              <a:t>  display: flex;</a:t>
-            </a:r>
-          </a:p>
-          <a:p>
-            <a:pPr marL="0" indent="0">
-              <a:spcBef>
-                <a:spcPts val="0"/>
-              </a:spcBef>
-              <a:buNone/>
-            </a:pPr>
-            <a:r>
-              <a:rPr lang="en-US" sz="1400" dirty="0"/>
-              <a:t>  flex-direction: column;</a:t>
-            </a:r>
-          </a:p>
-          <a:p>
-            <a:pPr marL="0" indent="0">
-              <a:spcBef>
-                <a:spcPts val="0"/>
-              </a:spcBef>
-              <a:buNone/>
-            </a:pPr>
-            <a:r>
-              <a:rPr lang="en-US" sz="1400" dirty="0"/>
-              <a:t>  justify-content: space-between;</a:t>
-            </a:r>
-          </a:p>
-          <a:p>
-            <a:pPr marL="0" indent="0">
-              <a:spcBef>
-                <a:spcPts val="0"/>
-              </a:spcBef>
-              <a:buNone/>
-            </a:pPr>
-            <a:r>
-              <a:rPr lang="en-US" sz="1400" dirty="0"/>
-              <a:t>  align-items: center;</a:t>
-            </a:r>
-          </a:p>
-          <a:p>
-            <a:pPr marL="0" indent="0">
-              <a:spcBef>
-                <a:spcPts val="0"/>
-              </a:spcBef>
-              <a:buNone/>
-            </a:pPr>
-            <a:r>
-              <a:rPr lang="en-US" sz="1400" dirty="0"/>
-              <a:t>  box-sizing: border-box;</a:t>
-            </a:r>
-          </a:p>
-          <a:p>
-            <a:pPr marL="0" indent="0">
-              <a:spcBef>
-                <a:spcPts val="0"/>
-              </a:spcBef>
-              <a:buNone/>
-            </a:pPr>
-            <a:r>
-              <a:rPr lang="en-US" sz="1400" dirty="0"/>
-              <a:t>  height: 500;</a:t>
-            </a:r>
-          </a:p>
-          <a:p>
-            <a:pPr marL="0" indent="0">
-              <a:spcBef>
-                <a:spcPts val="0"/>
-              </a:spcBef>
-              <a:buNone/>
-            </a:pPr>
-            <a:r>
-              <a:rPr lang="en-US" sz="1400" dirty="0"/>
-              <a:t>  width: 500px;</a:t>
-            </a:r>
-          </a:p>
-          <a:p>
-            <a:pPr marL="0" indent="0">
-              <a:spcBef>
-                <a:spcPts val="0"/>
-              </a:spcBef>
-              <a:buNone/>
-            </a:pPr>
-            <a:r>
-              <a:rPr lang="en-US" sz="1400" dirty="0"/>
-              <a:t>  border: 1px solid #aaaaaa;</a:t>
-            </a:r>
-          </a:p>
-          <a:p>
-            <a:pPr marL="0" indent="0">
-              <a:spcBef>
-                <a:spcPts val="0"/>
-              </a:spcBef>
-              <a:buNone/>
-            </a:pPr>
-            <a:r>
-              <a:rPr lang="en-US" sz="1400" dirty="0"/>
-              <a:t>  background-color: #454545;</a:t>
-            </a:r>
-          </a:p>
-          <a:p>
-            <a:pPr marL="0" indent="0">
-              <a:spcBef>
-                <a:spcPts val="0"/>
-              </a:spcBef>
-              <a:buNone/>
-            </a:pPr>
-            <a:r>
-              <a:rPr lang="en-US" sz="1400" dirty="0"/>
-              <a:t>}</a:t>
-            </a:r>
-          </a:p>
-          <a:p>
-            <a:pPr marL="0" indent="0">
-              <a:spcBef>
-                <a:spcPts val="0"/>
-              </a:spcBef>
-              <a:buNone/>
-            </a:pPr>
-            <a:r>
-              <a:rPr lang="en-US" sz="1400" dirty="0"/>
-              <a:t>.item {</a:t>
-            </a:r>
-          </a:p>
-          <a:p>
-            <a:pPr marL="0" indent="0">
-              <a:spcBef>
-                <a:spcPts val="0"/>
-              </a:spcBef>
-              <a:buNone/>
-            </a:pPr>
-            <a:r>
-              <a:rPr lang="en-US" sz="1400" dirty="0"/>
-              <a:t>  height: 100px;</a:t>
-            </a:r>
-          </a:p>
-          <a:p>
-            <a:pPr marL="0" indent="0">
-              <a:spcBef>
-                <a:spcPts val="0"/>
-              </a:spcBef>
-              <a:buNone/>
-            </a:pPr>
-            <a:r>
-              <a:rPr lang="en-US" sz="1400" dirty="0"/>
-              <a:t>  width: 100px;</a:t>
-            </a:r>
-          </a:p>
-          <a:p>
-            <a:pPr marL="0" indent="0">
-              <a:spcBef>
-                <a:spcPts val="0"/>
-              </a:spcBef>
-              <a:buNone/>
-            </a:pPr>
-            <a:r>
-              <a:rPr lang="en-US" sz="1400" dirty="0"/>
-              <a:t>  border: 2px solid blue;</a:t>
-            </a:r>
-          </a:p>
-          <a:p>
-            <a:pPr marL="0" indent="0">
-              <a:spcBef>
-                <a:spcPts val="0"/>
-              </a:spcBef>
-              <a:buNone/>
-            </a:pPr>
-            <a:r>
-              <a:rPr lang="en-US" sz="1400" dirty="0"/>
-              <a:t>  background-color: </a:t>
-            </a:r>
-            <a:r>
-              <a:rPr lang="en-US" sz="1400" dirty="0" err="1"/>
-              <a:t>lightblue</a:t>
-            </a:r>
-            <a:r>
-              <a:rPr lang="en-US" sz="1400" dirty="0"/>
-              <a:t>;</a:t>
-            </a:r>
-          </a:p>
-          <a:p>
-            <a:pPr marL="0" indent="0">
-              <a:spcBef>
-                <a:spcPts val="0"/>
-              </a:spcBef>
-              <a:buNone/>
-            </a:pPr>
-            <a:r>
-              <a:rPr lang="en-US" sz="1400" dirty="0"/>
-              <a:t>}</a:t>
-            </a:r>
-          </a:p>
-          <a:p>
-            <a:pPr marL="0" indent="0">
-              <a:spcBef>
-                <a:spcPts val="0"/>
-              </a:spcBef>
-              <a:buNone/>
-            </a:pPr>
-            <a:endParaRPr lang="en-US" dirty="0"/>
+              <a:t>If it makes sense to use a grid that’s what you should use. If you’re using grid and fighting with rows and columns you should switch to flex, its that simple. </a:t>
+            </a:r>
           </a:p>
         </p:txBody>
       </p:sp>
     </p:spTree>
     <p:extLst>
       <p:ext uri="{BB962C8B-B14F-4D97-AF65-F5344CB8AC3E}">
-        <p14:creationId xmlns:p14="http://schemas.microsoft.com/office/powerpoint/2010/main" val="1525785460"/>
+        <p14:creationId xmlns:p14="http://schemas.microsoft.com/office/powerpoint/2010/main" val="1846155002"/>
       </p:ext>
     </p:extLst>
   </p:cSld>
@@ -19452,7 +19749,7 @@
           <p:cNvPr id="2" name="Title 1">
             <a:extLst>
               <a:ext uri="{FF2B5EF4-FFF2-40B4-BE49-F238E27FC236}">
-                <a16:creationId xmlns:a16="http://schemas.microsoft.com/office/drawing/2014/main" id="{E677A1B9-33DB-262A-C54D-31C6B511B49E}"/>
+                <a16:creationId xmlns:a16="http://schemas.microsoft.com/office/drawing/2014/main" id="{B75805CF-D467-57A4-6BF2-F2AF7F1E307B}"/>
               </a:ext>
             </a:extLst>
           </p:cNvPr>
@@ -19463,14 +19760,21 @@
             <p:ph type="title"/>
           </p:nvPr>
         </p:nvSpPr>
-        <p:spPr/>
-        <p:txBody>
-          <a:bodyPr/>
+        <p:spPr>
+          <a:xfrm>
+            <a:off x="429768" y="283464"/>
+            <a:ext cx="10652760" cy="492913"/>
+          </a:xfrm>
+        </p:spPr>
+        <p:txBody>
+          <a:bodyPr>
+            <a:normAutofit fontScale="90000"/>
+          </a:bodyPr>
           <a:lstStyle/>
           <a:p>
             <a:r>
               <a:rPr lang="en-US" dirty="0"/>
-              <a:t>JSX file</a:t>
+              <a:t>Center a div</a:t>
             </a:r>
           </a:p>
         </p:txBody>
@@ -19480,7 +19784,7 @@
           <p:cNvPr id="3" name="Content Placeholder 2">
             <a:extLst>
               <a:ext uri="{FF2B5EF4-FFF2-40B4-BE49-F238E27FC236}">
-                <a16:creationId xmlns:a16="http://schemas.microsoft.com/office/drawing/2014/main" id="{508A66E4-2AF9-9E84-1D11-1BD1EA68A798}"/>
+                <a16:creationId xmlns:a16="http://schemas.microsoft.com/office/drawing/2014/main" id="{B3DC4752-161C-34E3-B0A7-A5EF63C91734}"/>
               </a:ext>
             </a:extLst>
           </p:cNvPr>
@@ -19491,9 +19795,16 @@
             <p:ph idx="1"/>
           </p:nvPr>
         </p:nvSpPr>
-        <p:spPr/>
-        <p:txBody>
-          <a:bodyPr/>
+        <p:spPr>
+          <a:xfrm>
+            <a:off x="895594" y="776377"/>
+            <a:ext cx="10652760" cy="5934974"/>
+          </a:xfrm>
+        </p:spPr>
+        <p:txBody>
+          <a:bodyPr>
+            <a:normAutofit/>
+          </a:bodyPr>
           <a:lstStyle/>
           <a:p>
             <a:pPr marL="0" indent="0">
@@ -19501,7 +19812,15 @@
             </a:pPr>
             <a:r>
               <a:rPr lang="en-US" dirty="0"/>
-              <a:t>import styles from "./Boxes.module.css";</a:t>
+              <a:t>From now on when you see &lt;div </a:t>
+            </a:r>
+            <a:r>
+              <a:rPr lang="en-US" dirty="0" err="1"/>
+              <a:t>className</a:t>
+            </a:r>
+            <a:r>
+              <a:rPr lang="en-US" dirty="0"/>
+              <a:t>&gt; hello &lt;/div&gt; think box.</a:t>
             </a:r>
           </a:p>
           <a:p>
@@ -19510,7 +19829,33 @@
             </a:pPr>
             <a:r>
               <a:rPr lang="en-US" dirty="0"/>
-              <a:t>export default function Boxes() {</a:t>
+              <a:t>Big box = container,  Little box = item</a:t>
+            </a:r>
+          </a:p>
+          <a:p>
+            <a:pPr marL="0" indent="0">
+              <a:buNone/>
+            </a:pPr>
+            <a:r>
+              <a:rPr lang="en-US" sz="1400" dirty="0"/>
+              <a:t>Thes two </a:t>
+            </a:r>
+            <a:r>
+              <a:rPr lang="en-US" sz="1400" dirty="0" err="1"/>
+              <a:t>css</a:t>
+            </a:r>
+            <a:r>
+              <a:rPr lang="en-US" sz="1400" dirty="0"/>
+              <a:t> classes will give you a grey box 500px wide with a blue box perfectly aligned in the center</a:t>
+            </a:r>
+          </a:p>
+          <a:p>
+            <a:pPr marL="0" indent="0">
+              <a:buNone/>
+            </a:pPr>
+            <a:r>
+              <a:rPr lang="en-US" sz="1400" dirty="0"/>
+              <a:t>.container {</a:t>
             </a:r>
           </a:p>
           <a:p>
@@ -19521,8 +19866,8 @@
               <a:buNone/>
             </a:pPr>
             <a:r>
-              <a:rPr lang="en-US" dirty="0"/>
-              <a:t>  return (</a:t>
+              <a:rPr lang="en-US" sz="1400" dirty="0"/>
+              <a:t>  display: flex;</a:t>
             </a:r>
           </a:p>
           <a:p>
@@ -19533,24 +19878,8 @@
               <a:buNone/>
             </a:pPr>
             <a:r>
-              <a:rPr lang="en-US" dirty="0"/>
-              <a:t>    &lt;div </a:t>
-            </a:r>
-            <a:r>
-              <a:rPr lang="en-US" dirty="0" err="1"/>
-              <a:t>className</a:t>
-            </a:r>
-            <a:r>
-              <a:rPr lang="en-US" dirty="0"/>
-              <a:t>={</a:t>
-            </a:r>
-            <a:r>
-              <a:rPr lang="en-US" dirty="0" err="1"/>
-              <a:t>styles.container</a:t>
-            </a:r>
-            <a:r>
-              <a:rPr lang="en-US" dirty="0"/>
-              <a:t>}&gt;</a:t>
+              <a:rPr lang="en-US" sz="1400" dirty="0"/>
+              <a:t>  flex-direction: column;</a:t>
             </a:r>
           </a:p>
           <a:p>
@@ -19561,24 +19890,8 @@
               <a:buNone/>
             </a:pPr>
             <a:r>
-              <a:rPr lang="en-US" dirty="0"/>
-              <a:t>       &lt;div </a:t>
-            </a:r>
-            <a:r>
-              <a:rPr lang="en-US" dirty="0" err="1"/>
-              <a:t>className</a:t>
-            </a:r>
-            <a:r>
-              <a:rPr lang="en-US" dirty="0"/>
-              <a:t>={</a:t>
-            </a:r>
-            <a:r>
-              <a:rPr lang="en-US" dirty="0" err="1"/>
-              <a:t>styles.item</a:t>
-            </a:r>
-            <a:r>
-              <a:rPr lang="en-US" dirty="0"/>
-              <a:t>}&gt; Little Box&lt;/div&gt;</a:t>
+              <a:rPr lang="en-US" sz="1400" dirty="0"/>
+              <a:t>  justify-content: space-between;</a:t>
             </a:r>
           </a:p>
           <a:p>
@@ -19589,8 +19902,8 @@
               <a:buNone/>
             </a:pPr>
             <a:r>
-              <a:rPr lang="en-US" dirty="0"/>
-              <a:t>    &lt;/div&gt;</a:t>
+              <a:rPr lang="en-US" sz="1400" dirty="0"/>
+              <a:t>  align-items: center;</a:t>
             </a:r>
           </a:p>
           <a:p>
@@ -19601,8 +19914,8 @@
               <a:buNone/>
             </a:pPr>
             <a:r>
-              <a:rPr lang="en-US" dirty="0"/>
-              <a:t>  )</a:t>
+              <a:rPr lang="en-US" sz="1400" dirty="0"/>
+              <a:t>  box-sizing: border-box;</a:t>
             </a:r>
           </a:p>
           <a:p>
@@ -19613,16 +19926,153 @@
               <a:buNone/>
             </a:pPr>
             <a:r>
-              <a:rPr lang="en-US" dirty="0"/>
-              <a:t>};</a:t>
-            </a:r>
+              <a:rPr lang="en-US" sz="1400" dirty="0"/>
+              <a:t>  height: 500;</a:t>
+            </a:r>
+          </a:p>
+          <a:p>
+            <a:pPr marL="0" indent="0">
+              <a:spcBef>
+                <a:spcPts val="0"/>
+              </a:spcBef>
+              <a:buNone/>
+            </a:pPr>
+            <a:r>
+              <a:rPr lang="en-US" sz="1400" dirty="0"/>
+              <a:t>  width: 500px;</a:t>
+            </a:r>
+          </a:p>
+          <a:p>
+            <a:pPr marL="0" indent="0">
+              <a:spcBef>
+                <a:spcPts val="0"/>
+              </a:spcBef>
+              <a:buNone/>
+            </a:pPr>
+            <a:r>
+              <a:rPr lang="en-US" sz="1400" dirty="0"/>
+              <a:t>  border: 1px solid #aaaaaa;</a:t>
+            </a:r>
+          </a:p>
+          <a:p>
+            <a:pPr marL="0" indent="0">
+              <a:spcBef>
+                <a:spcPts val="0"/>
+              </a:spcBef>
+              <a:buNone/>
+            </a:pPr>
+            <a:r>
+              <a:rPr lang="en-US" sz="1400" dirty="0"/>
+              <a:t>  background-color: #454545;</a:t>
+            </a:r>
+          </a:p>
+          <a:p>
+            <a:pPr marL="0" indent="0">
+              <a:spcBef>
+                <a:spcPts val="0"/>
+              </a:spcBef>
+              <a:buNone/>
+            </a:pPr>
+            <a:r>
+              <a:rPr lang="en-US" sz="1400" dirty="0"/>
+              <a:t>}</a:t>
+            </a:r>
+          </a:p>
+          <a:p>
+            <a:pPr marL="0" indent="0">
+              <a:spcBef>
+                <a:spcPts val="0"/>
+              </a:spcBef>
+              <a:buNone/>
+            </a:pPr>
+            <a:r>
+              <a:rPr lang="en-US" sz="1400" dirty="0"/>
+              <a:t>.item {</a:t>
+            </a:r>
+          </a:p>
+          <a:p>
+            <a:pPr marL="0" indent="0">
+              <a:spcBef>
+                <a:spcPts val="0"/>
+              </a:spcBef>
+              <a:buNone/>
+            </a:pPr>
+            <a:r>
+              <a:rPr lang="en-US" sz="1400" dirty="0"/>
+              <a:t>  height: 100px;</a:t>
+            </a:r>
+          </a:p>
+          <a:p>
+            <a:pPr marL="0" indent="0">
+              <a:spcBef>
+                <a:spcPts val="0"/>
+              </a:spcBef>
+              <a:buNone/>
+            </a:pPr>
+            <a:r>
+              <a:rPr lang="en-US" sz="1400" dirty="0"/>
+              <a:t>  width: 100px;</a:t>
+            </a:r>
+          </a:p>
+          <a:p>
+            <a:pPr marL="0" indent="0">
+              <a:spcBef>
+                <a:spcPts val="0"/>
+              </a:spcBef>
+              <a:buNone/>
+            </a:pPr>
+            <a:r>
+              <a:rPr lang="en-US" sz="1400" dirty="0"/>
+              <a:t>  border: 2px solid blue;</a:t>
+            </a:r>
+          </a:p>
+          <a:p>
+            <a:pPr marL="0" indent="0">
+              <a:spcBef>
+                <a:spcPts val="0"/>
+              </a:spcBef>
+              <a:buNone/>
+            </a:pPr>
+            <a:r>
+              <a:rPr lang="en-US" sz="1400" dirty="0"/>
+              <a:t>  background-color: </a:t>
+            </a:r>
+            <a:r>
+              <a:rPr lang="en-US" sz="1400" dirty="0" err="1"/>
+              <a:t>lightblue</a:t>
+            </a:r>
+            <a:r>
+              <a:rPr lang="en-US" sz="1400" dirty="0"/>
+              <a:t>;</a:t>
+            </a:r>
+          </a:p>
+          <a:p>
+            <a:pPr marL="0" indent="0">
+              <a:spcBef>
+                <a:spcPts val="0"/>
+              </a:spcBef>
+              <a:buNone/>
+            </a:pPr>
+            <a:r>
+              <a:rPr lang="en-US" sz="1400" dirty="0"/>
+              <a:t>}</a:t>
+            </a:r>
+          </a:p>
+          <a:p>
+            <a:pPr marL="0" indent="0">
+              <a:spcBef>
+                <a:spcPts val="0"/>
+              </a:spcBef>
+              <a:buNone/>
+            </a:pPr>
+            <a:endParaRPr lang="en-US" dirty="0"/>
           </a:p>
         </p:txBody>
       </p:sp>
     </p:spTree>
     <p:extLst>
       <p:ext uri="{BB962C8B-B14F-4D97-AF65-F5344CB8AC3E}">
-        <p14:creationId xmlns:p14="http://schemas.microsoft.com/office/powerpoint/2010/main" val="471398665"/>
+        <p14:creationId xmlns:p14="http://schemas.microsoft.com/office/powerpoint/2010/main" val="1525785460"/>
       </p:ext>
     </p:extLst>
   </p:cSld>

--- a/slides/CSS Flex box & Flex gird.pptx
+++ b/slides/CSS Flex box & Flex gird.pptx
@@ -5,7 +5,7 @@
     <p:sldMasterId id="2147483650" r:id="rId1"/>
   </p:sldMasterIdLst>
   <p:notesMasterIdLst>
-    <p:notesMasterId r:id="rId14"/>
+    <p:notesMasterId r:id="rId15"/>
   </p:notesMasterIdLst>
   <p:sldIdLst>
     <p:sldId id="256" r:id="rId2"/>
@@ -20,6 +20,7 @@
     <p:sldId id="264" r:id="rId11"/>
     <p:sldId id="265" r:id="rId12"/>
     <p:sldId id="267" r:id="rId13"/>
+    <p:sldId id="268" r:id="rId14"/>
   </p:sldIdLst>
   <p:sldSz cx="12192000" cy="6858000"/>
   <p:notesSz cx="6858000" cy="9144000"/>
@@ -17431,14 +17432,16 @@
         </p:nvSpPr>
         <p:spPr/>
         <p:txBody>
-          <a:bodyPr/>
+          <a:bodyPr>
+            <a:normAutofit/>
+          </a:bodyPr>
           <a:lstStyle/>
           <a:p>
             <a:pPr marL="0" indent="0">
               <a:buNone/>
             </a:pPr>
             <a:r>
-              <a:rPr lang="en-US" dirty="0"/>
+              <a:rPr lang="en-US" sz="2400" dirty="0"/>
               <a:t>import styles from "./Boxes.module.css";</a:t>
             </a:r>
           </a:p>
@@ -17447,7 +17450,7 @@
               <a:buNone/>
             </a:pPr>
             <a:r>
-              <a:rPr lang="en-US" dirty="0"/>
+              <a:rPr lang="en-US" sz="2400" dirty="0"/>
               <a:t>export default function Boxes() {</a:t>
             </a:r>
           </a:p>
@@ -17459,7 +17462,7 @@
               <a:buNone/>
             </a:pPr>
             <a:r>
-              <a:rPr lang="en-US" dirty="0"/>
+              <a:rPr lang="en-US" sz="2400" dirty="0"/>
               <a:t>  return (</a:t>
             </a:r>
           </a:p>
@@ -17471,23 +17474,23 @@
               <a:buNone/>
             </a:pPr>
             <a:r>
-              <a:rPr lang="en-US" dirty="0"/>
+              <a:rPr lang="en-US" sz="2400" dirty="0"/>
               <a:t>    &lt;div </a:t>
             </a:r>
             <a:r>
-              <a:rPr lang="en-US" dirty="0" err="1"/>
+              <a:rPr lang="en-US" sz="2400" dirty="0" err="1"/>
               <a:t>className</a:t>
             </a:r>
             <a:r>
-              <a:rPr lang="en-US" dirty="0"/>
+              <a:rPr lang="en-US" sz="2400" dirty="0"/>
               <a:t>={</a:t>
             </a:r>
             <a:r>
-              <a:rPr lang="en-US" dirty="0" err="1"/>
+              <a:rPr lang="en-US" sz="2400" dirty="0" err="1"/>
               <a:t>styles.container</a:t>
             </a:r>
             <a:r>
-              <a:rPr lang="en-US" dirty="0"/>
+              <a:rPr lang="en-US" sz="2400" dirty="0"/>
               <a:t>}&gt;</a:t>
             </a:r>
           </a:p>
@@ -17499,23 +17502,23 @@
               <a:buNone/>
             </a:pPr>
             <a:r>
-              <a:rPr lang="en-US" dirty="0"/>
+              <a:rPr lang="en-US" sz="2400" dirty="0"/>
               <a:t>       &lt;div </a:t>
             </a:r>
             <a:r>
-              <a:rPr lang="en-US" dirty="0" err="1"/>
+              <a:rPr lang="en-US" sz="2400" dirty="0" err="1"/>
               <a:t>className</a:t>
             </a:r>
             <a:r>
-              <a:rPr lang="en-US" dirty="0"/>
+              <a:rPr lang="en-US" sz="2400" dirty="0"/>
               <a:t>={</a:t>
             </a:r>
             <a:r>
-              <a:rPr lang="en-US" dirty="0" err="1"/>
+              <a:rPr lang="en-US" sz="2400" dirty="0" err="1"/>
               <a:t>styles.item</a:t>
             </a:r>
             <a:r>
-              <a:rPr lang="en-US" dirty="0"/>
+              <a:rPr lang="en-US" sz="2400" dirty="0"/>
               <a:t>}&gt; Little Box&lt;/div&gt;</a:t>
             </a:r>
           </a:p>
@@ -17527,7 +17530,7 @@
               <a:buNone/>
             </a:pPr>
             <a:r>
-              <a:rPr lang="en-US" dirty="0"/>
+              <a:rPr lang="en-US" sz="2400" dirty="0"/>
               <a:t>    &lt;/div&gt;</a:t>
             </a:r>
           </a:p>
@@ -17539,7 +17542,7 @@
               <a:buNone/>
             </a:pPr>
             <a:r>
-              <a:rPr lang="en-US" dirty="0"/>
+              <a:rPr lang="en-US" sz="2400" dirty="0"/>
               <a:t>  )</a:t>
             </a:r>
           </a:p>
@@ -17551,7 +17554,7 @@
               <a:buNone/>
             </a:pPr>
             <a:r>
-              <a:rPr lang="en-US" dirty="0"/>
+              <a:rPr lang="en-US" sz="2400" dirty="0"/>
               <a:t>};</a:t>
             </a:r>
           </a:p>
@@ -17857,6 +17860,27 @@
           </a:bodyPr>
           <a:lstStyle/>
           <a:p>
+            <a:pPr marL="0" indent="0">
+              <a:spcBef>
+                <a:spcPts val="0"/>
+              </a:spcBef>
+              <a:buNone/>
+            </a:pPr>
+            <a:r>
+              <a:rPr lang="en-US" sz="2800" dirty="0"/>
+              <a:t>Typical flexbox layout</a:t>
+            </a:r>
+          </a:p>
+          <a:p>
+            <a:pPr marL="0" indent="0">
+              <a:spcBef>
+                <a:spcPts val="0"/>
+              </a:spcBef>
+              <a:buNone/>
+            </a:pPr>
+            <a:endParaRPr lang="en-US" sz="2800" dirty="0"/>
+          </a:p>
+          <a:p>
             <a:pPr>
               <a:spcBef>
                 <a:spcPts val="0"/>
@@ -17966,23 +17990,7 @@
                   <a:srgbClr val="00B050"/>
                 </a:solidFill>
               </a:rPr>
-              <a:t>  box-sizing: border-box;    /* width and </a:t>
-            </a:r>
-            <a:r>
-              <a:rPr lang="en-US" sz="2400">
-                <a:solidFill>
-                  <a:srgbClr val="00B050"/>
-                </a:solidFill>
-              </a:rPr>
-              <a:t>height include </a:t>
-            </a:r>
-            <a:r>
-              <a:rPr lang="en-US" sz="2400" dirty="0">
-                <a:solidFill>
-                  <a:srgbClr val="00B050"/>
-                </a:solidFill>
-              </a:rPr>
-              <a:t>padding and border*/ </a:t>
+              <a:t>  box-sizing: border-box;    /* width and height include padding and border*/ </a:t>
             </a:r>
           </a:p>
           <a:p>
@@ -18008,6 +18016,152 @@
     <p:extLst>
       <p:ext uri="{BB962C8B-B14F-4D97-AF65-F5344CB8AC3E}">
         <p14:creationId xmlns:p14="http://schemas.microsoft.com/office/powerpoint/2010/main" val="769394946"/>
+      </p:ext>
+    </p:extLst>
+  </p:cSld>
+  <p:clrMapOvr>
+    <a:masterClrMapping/>
+  </p:clrMapOvr>
+</p:sld>
+</file>
+
+<file path=ppt/slides/slide13.xml><?xml version="1.0" encoding="utf-8"?>
+<p:sld xmlns:a="http://schemas.openxmlformats.org/drawingml/2006/main" xmlns:r="http://schemas.openxmlformats.org/officeDocument/2006/relationships" xmlns:p="http://schemas.openxmlformats.org/presentationml/2006/main">
+  <p:cSld>
+    <p:spTree>
+      <p:nvGrpSpPr>
+        <p:cNvPr id="1" name=""/>
+        <p:cNvGrpSpPr/>
+        <p:nvPr/>
+      </p:nvGrpSpPr>
+      <p:grpSpPr>
+        <a:xfrm>
+          <a:off x="0" y="0"/>
+          <a:ext cx="0" cy="0"/>
+          <a:chOff x="0" y="0"/>
+          <a:chExt cx="0" cy="0"/>
+        </a:xfrm>
+      </p:grpSpPr>
+      <p:sp>
+        <p:nvSpPr>
+          <p:cNvPr id="2" name="Title 1">
+            <a:extLst>
+              <a:ext uri="{FF2B5EF4-FFF2-40B4-BE49-F238E27FC236}">
+                <a16:creationId xmlns:a16="http://schemas.microsoft.com/office/drawing/2014/main" id="{62C78E29-5D9E-4431-058D-7D03BCB442C7}"/>
+              </a:ext>
+            </a:extLst>
+          </p:cNvPr>
+          <p:cNvSpPr>
+            <a:spLocks noGrp="1"/>
+          </p:cNvSpPr>
+          <p:nvPr>
+            <p:ph type="title"/>
+          </p:nvPr>
+        </p:nvSpPr>
+        <p:spPr>
+          <a:xfrm>
+            <a:off x="429768" y="283464"/>
+            <a:ext cx="10652760" cy="1097280"/>
+          </a:xfrm>
+        </p:spPr>
+        <p:txBody>
+          <a:bodyPr/>
+          <a:lstStyle/>
+          <a:p>
+            <a:r>
+              <a:rPr lang="en-US" b="1" dirty="0"/>
+              <a:t>Flex Wrap property</a:t>
+            </a:r>
+            <a:br>
+              <a:rPr lang="en-US" b="1" dirty="0"/>
+            </a:br>
+            <a:endParaRPr lang="en-US" dirty="0"/>
+          </a:p>
+        </p:txBody>
+      </p:sp>
+      <p:sp>
+        <p:nvSpPr>
+          <p:cNvPr id="3" name="Content Placeholder 2">
+            <a:extLst>
+              <a:ext uri="{FF2B5EF4-FFF2-40B4-BE49-F238E27FC236}">
+                <a16:creationId xmlns:a16="http://schemas.microsoft.com/office/drawing/2014/main" id="{2925580E-BEA1-AFB3-73B0-46D703FCBA05}"/>
+              </a:ext>
+            </a:extLst>
+          </p:cNvPr>
+          <p:cNvSpPr>
+            <a:spLocks noGrp="1"/>
+          </p:cNvSpPr>
+          <p:nvPr>
+            <p:ph idx="1"/>
+          </p:nvPr>
+        </p:nvSpPr>
+        <p:spPr>
+          <a:xfrm>
+            <a:off x="429768" y="1101012"/>
+            <a:ext cx="10652760" cy="5180916"/>
+          </a:xfrm>
+        </p:spPr>
+        <p:txBody>
+          <a:bodyPr>
+            <a:normAutofit/>
+          </a:bodyPr>
+          <a:lstStyle/>
+          <a:p>
+            <a:r>
+              <a:rPr lang="en-US" sz="2400" dirty="0"/>
+              <a:t>The flex-wrap method allows contents to wrap around to the next available space instead of flowing off the screen.</a:t>
+            </a:r>
+          </a:p>
+          <a:p>
+            <a:r>
+              <a:rPr lang="en-US" sz="2400" dirty="0"/>
+              <a:t>Basic syntax              flex-wrap: wrap;</a:t>
+            </a:r>
+          </a:p>
+          <a:p>
+            <a:r>
+              <a:rPr lang="en-US" sz="2400" dirty="0"/>
+              <a:t>Properties:    </a:t>
+            </a:r>
+            <a:r>
+              <a:rPr lang="en-US" sz="2400" dirty="0" err="1"/>
+              <a:t>nowrap</a:t>
+            </a:r>
+            <a:r>
+              <a:rPr lang="en-US" sz="2400" dirty="0"/>
+              <a:t>   (default)</a:t>
+            </a:r>
+          </a:p>
+          <a:p>
+            <a:pPr marL="0" indent="0">
+              <a:buNone/>
+            </a:pPr>
+            <a:r>
+              <a:rPr lang="en-US" sz="2400" dirty="0"/>
+              <a:t>                          wrap</a:t>
+            </a:r>
+          </a:p>
+          <a:p>
+            <a:pPr marL="0" indent="0">
+              <a:buNone/>
+            </a:pPr>
+            <a:r>
+              <a:rPr lang="en-US" sz="2400" dirty="0"/>
+              <a:t>                          wrap-reverse </a:t>
+            </a:r>
+          </a:p>
+          <a:p>
+            <a:endParaRPr lang="en-US" sz="2400" dirty="0"/>
+          </a:p>
+          <a:p>
+            <a:endParaRPr lang="en-US" sz="2400" dirty="0"/>
+          </a:p>
+        </p:txBody>
+      </p:sp>
+    </p:spTree>
+    <p:extLst>
+      <p:ext uri="{BB962C8B-B14F-4D97-AF65-F5344CB8AC3E}">
+        <p14:creationId xmlns:p14="http://schemas.microsoft.com/office/powerpoint/2010/main" val="3020816254"/>
       </p:ext>
     </p:extLst>
   </p:cSld>
@@ -19020,7 +19174,12 @@
             <p:ph type="title"/>
           </p:nvPr>
         </p:nvSpPr>
-        <p:spPr/>
+        <p:spPr>
+          <a:xfrm>
+            <a:off x="429768" y="283464"/>
+            <a:ext cx="10652760" cy="630936"/>
+          </a:xfrm>
+        </p:spPr>
         <p:txBody>
           <a:bodyPr/>
           <a:lstStyle/>
@@ -19050,8 +19209,8 @@
         </p:nvSpPr>
         <p:spPr>
           <a:xfrm>
-            <a:off x="1932820" y="1252728"/>
-            <a:ext cx="7646656" cy="5096314"/>
+            <a:off x="1932820" y="914400"/>
+            <a:ext cx="7646656" cy="5411755"/>
           </a:xfrm>
         </p:spPr>
         <p:txBody>
@@ -19061,50 +19220,50 @@
           <a:lstStyle/>
           <a:p>
             <a:r>
-              <a:rPr lang="en-US" dirty="0"/>
+              <a:rPr lang="en-US" sz="2000" dirty="0"/>
               <a:t>Grid is </a:t>
             </a:r>
             <a:r>
-              <a:rPr lang="en-US" b="1" dirty="0"/>
+              <a:rPr lang="en-US" sz="2000" b="1" dirty="0"/>
               <a:t>two-dimensional</a:t>
             </a:r>
             <a:r>
-              <a:rPr lang="en-US" dirty="0"/>
+              <a:rPr lang="en-US" sz="2000" dirty="0"/>
               <a:t> (rows and columns).</a:t>
             </a:r>
           </a:p>
           <a:p>
             <a:r>
-              <a:rPr lang="en-US" dirty="0"/>
+              <a:rPr lang="en-US" sz="2000" dirty="0"/>
               <a:t>grid-template-columns defines column tracks.</a:t>
             </a:r>
           </a:p>
           <a:p>
             <a:r>
-              <a:rPr lang="en-US" dirty="0"/>
+              <a:rPr lang="en-US" sz="2000" dirty="0"/>
               <a:t>grid-template-rows defines row tracks.</a:t>
             </a:r>
           </a:p>
           <a:p>
             <a:r>
-              <a:rPr lang="en-US" dirty="0"/>
+              <a:rPr lang="en-US" sz="2000" dirty="0"/>
               <a:t>gap controls spacing between tracks.</a:t>
             </a:r>
           </a:p>
           <a:p>
             <a:r>
-              <a:rPr lang="en-US" dirty="0"/>
+              <a:rPr lang="en-US" sz="2000" dirty="0"/>
               <a:t>grid-column and grid-row control placement.</a:t>
             </a:r>
           </a:p>
           <a:p>
             <a:r>
-              <a:rPr lang="en-US" dirty="0"/>
+              <a:rPr lang="en-US" sz="2000" dirty="0"/>
               <a:t>grid-template-areas allows named layout regions like this:</a:t>
             </a:r>
           </a:p>
           <a:p>
-            <a:endParaRPr lang="en-US" dirty="0"/>
+            <a:endParaRPr lang="en-US" sz="2000" dirty="0"/>
           </a:p>
           <a:p>
             <a:pPr marL="0" indent="0">
@@ -19684,22 +19843,24 @@
           </a:xfrm>
         </p:spPr>
         <p:txBody>
-          <a:bodyPr/>
+          <a:bodyPr>
+            <a:normAutofit/>
+          </a:bodyPr>
           <a:lstStyle/>
           <a:p>
             <a:pPr marL="0" indent="0">
               <a:buNone/>
             </a:pPr>
             <a:r>
-              <a:rPr lang="en-US" dirty="0"/>
+              <a:rPr lang="en-US" sz="2400" dirty="0"/>
               <a:t>Moving boxes around helps to </a:t>
             </a:r>
             <a:r>
-              <a:rPr lang="en-US" dirty="0" err="1"/>
+              <a:rPr lang="en-US" sz="2400" dirty="0" err="1"/>
               <a:t>inderstand</a:t>
             </a:r>
             <a:r>
-              <a:rPr lang="en-US" dirty="0"/>
+              <a:rPr lang="en-US" sz="2400" dirty="0"/>
               <a:t> how layouts work with flexbox and grid. Think of a big box that holds little boxes that holds stuff. First you tell the big box (.container or .wrapper) how to arrange the little boxes (.item or .header).Then tell how to arrange the stuff that’s in the little boxes.</a:t>
             </a:r>
           </a:p>
@@ -19708,7 +19869,7 @@
               <a:buNone/>
             </a:pPr>
             <a:r>
-              <a:rPr lang="en-US" dirty="0"/>
+              <a:rPr lang="en-US" sz="2400" dirty="0"/>
               <a:t>If it makes sense to use a grid that’s what you should use. If you’re using grid and fighting with rows and columns you should switch to flex, its that simple. </a:t>
             </a:r>
           </a:p>
@@ -19803,7 +19964,7 @@
         </p:spPr>
         <p:txBody>
           <a:bodyPr>
-            <a:normAutofit/>
+            <a:normAutofit fontScale="85000" lnSpcReduction="10000"/>
           </a:bodyPr>
           <a:lstStyle/>
           <a:p>
@@ -19811,16 +19972,8 @@
               <a:buNone/>
             </a:pPr>
             <a:r>
-              <a:rPr lang="en-US" dirty="0"/>
-              <a:t>From now on when you see &lt;div </a:t>
-            </a:r>
-            <a:r>
-              <a:rPr lang="en-US" dirty="0" err="1"/>
-              <a:t>className</a:t>
-            </a:r>
-            <a:r>
-              <a:rPr lang="en-US" dirty="0"/>
-              <a:t>&gt; hello &lt;/div&gt; think box.</a:t>
+              <a:rPr lang="en-US" sz="2000" dirty="0"/>
+              <a:t>Big box = container,  Little box = item</a:t>
             </a:r>
           </a:p>
           <a:p>
@@ -19828,8 +19981,16 @@
               <a:buNone/>
             </a:pPr>
             <a:r>
-              <a:rPr lang="en-US" dirty="0"/>
-              <a:t>Big box = container,  Little box = item</a:t>
+              <a:rPr lang="en-US" sz="2000" dirty="0"/>
+              <a:t>Thes two </a:t>
+            </a:r>
+            <a:r>
+              <a:rPr lang="en-US" sz="2000" dirty="0" err="1"/>
+              <a:t>css</a:t>
+            </a:r>
+            <a:r>
+              <a:rPr lang="en-US" sz="2000" dirty="0"/>
+              <a:t> classes will give you a grey box 500px wide with a blue box perfectly aligned in the center</a:t>
             </a:r>
           </a:p>
           <a:p>
@@ -19837,24 +19998,7 @@
               <a:buNone/>
             </a:pPr>
             <a:r>
-              <a:rPr lang="en-US" sz="1400" dirty="0"/>
-              <a:t>Thes two </a:t>
-            </a:r>
-            <a:r>
-              <a:rPr lang="en-US" sz="1400" dirty="0" err="1"/>
-              <a:t>css</a:t>
-            </a:r>
-            <a:r>
-              <a:rPr lang="en-US" sz="1400" dirty="0"/>
-              <a:t> classes will give you a grey box 500px wide with a blue box perfectly aligned in the center</a:t>
-            </a:r>
-          </a:p>
-          <a:p>
-            <a:pPr marL="0" indent="0">
-              <a:buNone/>
-            </a:pPr>
-            <a:r>
-              <a:rPr lang="en-US" sz="1400" dirty="0"/>
+              <a:rPr lang="en-US" sz="2000" dirty="0"/>
               <a:t>.container {</a:t>
             </a:r>
           </a:p>
@@ -19866,7 +20010,7 @@
               <a:buNone/>
             </a:pPr>
             <a:r>
-              <a:rPr lang="en-US" sz="1400" dirty="0"/>
+              <a:rPr lang="en-US" sz="2000" dirty="0"/>
               <a:t>  display: flex;</a:t>
             </a:r>
           </a:p>
@@ -19878,7 +20022,7 @@
               <a:buNone/>
             </a:pPr>
             <a:r>
-              <a:rPr lang="en-US" sz="1400" dirty="0"/>
+              <a:rPr lang="en-US" sz="2000" dirty="0"/>
               <a:t>  flex-direction: column;</a:t>
             </a:r>
           </a:p>
@@ -19890,7 +20034,7 @@
               <a:buNone/>
             </a:pPr>
             <a:r>
-              <a:rPr lang="en-US" sz="1400" dirty="0"/>
+              <a:rPr lang="en-US" sz="2000" dirty="0"/>
               <a:t>  justify-content: space-between;</a:t>
             </a:r>
           </a:p>
@@ -19902,7 +20046,7 @@
               <a:buNone/>
             </a:pPr>
             <a:r>
-              <a:rPr lang="en-US" sz="1400" dirty="0"/>
+              <a:rPr lang="en-US" sz="2000" dirty="0"/>
               <a:t>  align-items: center;</a:t>
             </a:r>
           </a:p>
@@ -19914,7 +20058,7 @@
               <a:buNone/>
             </a:pPr>
             <a:r>
-              <a:rPr lang="en-US" sz="1400" dirty="0"/>
+              <a:rPr lang="en-US" sz="2000" dirty="0"/>
               <a:t>  box-sizing: border-box;</a:t>
             </a:r>
           </a:p>
@@ -19926,7 +20070,7 @@
               <a:buNone/>
             </a:pPr>
             <a:r>
-              <a:rPr lang="en-US" sz="1400" dirty="0"/>
+              <a:rPr lang="en-US" sz="2000" dirty="0"/>
               <a:t>  height: 500;</a:t>
             </a:r>
           </a:p>
@@ -19938,7 +20082,7 @@
               <a:buNone/>
             </a:pPr>
             <a:r>
-              <a:rPr lang="en-US" sz="1400" dirty="0"/>
+              <a:rPr lang="en-US" sz="2000" dirty="0"/>
               <a:t>  width: 500px;</a:t>
             </a:r>
           </a:p>
@@ -19950,7 +20094,7 @@
               <a:buNone/>
             </a:pPr>
             <a:r>
-              <a:rPr lang="en-US" sz="1400" dirty="0"/>
+              <a:rPr lang="en-US" sz="2000" dirty="0"/>
               <a:t>  border: 1px solid #aaaaaa;</a:t>
             </a:r>
           </a:p>
@@ -19962,7 +20106,7 @@
               <a:buNone/>
             </a:pPr>
             <a:r>
-              <a:rPr lang="en-US" sz="1400" dirty="0"/>
+              <a:rPr lang="en-US" sz="2000" dirty="0"/>
               <a:t>  background-color: #454545;</a:t>
             </a:r>
           </a:p>
@@ -19974,7 +20118,7 @@
               <a:buNone/>
             </a:pPr>
             <a:r>
-              <a:rPr lang="en-US" sz="1400" dirty="0"/>
+              <a:rPr lang="en-US" sz="2000" dirty="0"/>
               <a:t>}</a:t>
             </a:r>
           </a:p>
@@ -19986,7 +20130,7 @@
               <a:buNone/>
             </a:pPr>
             <a:r>
-              <a:rPr lang="en-US" sz="1400" dirty="0"/>
+              <a:rPr lang="en-US" sz="2000" dirty="0"/>
               <a:t>.item {</a:t>
             </a:r>
           </a:p>
@@ -19998,7 +20142,7 @@
               <a:buNone/>
             </a:pPr>
             <a:r>
-              <a:rPr lang="en-US" sz="1400" dirty="0"/>
+              <a:rPr lang="en-US" sz="2000" dirty="0"/>
               <a:t>  height: 100px;</a:t>
             </a:r>
           </a:p>
@@ -20010,7 +20154,7 @@
               <a:buNone/>
             </a:pPr>
             <a:r>
-              <a:rPr lang="en-US" sz="1400" dirty="0"/>
+              <a:rPr lang="en-US" sz="2000" dirty="0"/>
               <a:t>  width: 100px;</a:t>
             </a:r>
           </a:p>
@@ -20022,7 +20166,7 @@
               <a:buNone/>
             </a:pPr>
             <a:r>
-              <a:rPr lang="en-US" sz="1400" dirty="0"/>
+              <a:rPr lang="en-US" sz="2000" dirty="0"/>
               <a:t>  border: 2px solid blue;</a:t>
             </a:r>
           </a:p>
@@ -20034,15 +20178,15 @@
               <a:buNone/>
             </a:pPr>
             <a:r>
-              <a:rPr lang="en-US" sz="1400" dirty="0"/>
+              <a:rPr lang="en-US" sz="2000" dirty="0"/>
               <a:t>  background-color: </a:t>
             </a:r>
             <a:r>
-              <a:rPr lang="en-US" sz="1400" dirty="0" err="1"/>
+              <a:rPr lang="en-US" sz="2000" dirty="0" err="1"/>
               <a:t>lightblue</a:t>
             </a:r>
             <a:r>
-              <a:rPr lang="en-US" sz="1400" dirty="0"/>
+              <a:rPr lang="en-US" sz="2000" dirty="0"/>
               <a:t>;</a:t>
             </a:r>
           </a:p>
@@ -20054,7 +20198,7 @@
               <a:buNone/>
             </a:pPr>
             <a:r>
-              <a:rPr lang="en-US" sz="1400" dirty="0"/>
+              <a:rPr lang="en-US" sz="2000" dirty="0"/>
               <a:t>}</a:t>
             </a:r>
           </a:p>
